--- a/video/AI Risks, accountability and Global Regulations.pptx
+++ b/video/AI Risks, accountability and Global Regulations.pptx
@@ -9,10 +9,21 @@
     <p:sldId id="257" r:id="rId3"/>
     <p:sldId id="263" r:id="rId4"/>
     <p:sldId id="258" r:id="rId5"/>
-    <p:sldId id="259" r:id="rId6"/>
-    <p:sldId id="262" r:id="rId7"/>
-    <p:sldId id="264" r:id="rId8"/>
-    <p:sldId id="265" r:id="rId9"/>
+    <p:sldId id="270" r:id="rId6"/>
+    <p:sldId id="271" r:id="rId7"/>
+    <p:sldId id="259" r:id="rId8"/>
+    <p:sldId id="268" r:id="rId9"/>
+    <p:sldId id="273" r:id="rId10"/>
+    <p:sldId id="274" r:id="rId11"/>
+    <p:sldId id="275" r:id="rId12"/>
+    <p:sldId id="266" r:id="rId13"/>
+    <p:sldId id="272" r:id="rId14"/>
+    <p:sldId id="267" r:id="rId15"/>
+    <p:sldId id="276" r:id="rId16"/>
+    <p:sldId id="277" r:id="rId17"/>
+    <p:sldId id="278" r:id="rId18"/>
+    <p:sldId id="264" r:id="rId19"/>
+    <p:sldId id="265" r:id="rId20"/>
   </p:sldIdLst>
   <p:sldSz cx="12192000" cy="6858000"/>
   <p:notesSz cx="6858000" cy="9144000"/>
@@ -4729,6 +4740,13 @@
               </a:ext>
             </a:extLst>
           </p:spPr>
+          <p:txBody>
+            <a:bodyPr/>
+            <a:lstStyle/>
+            <a:p>
+              <a:endParaRPr lang="en-US"/>
+            </a:p>
+          </p:txBody>
         </p:sp>
         <p:sp>
           <p:nvSpPr>
@@ -4782,6 +4800,13 @@
               </a:ext>
             </a:extLst>
           </p:spPr>
+          <p:txBody>
+            <a:bodyPr/>
+            <a:lstStyle/>
+            <a:p>
+              <a:endParaRPr lang="en-US"/>
+            </a:p>
+          </p:txBody>
         </p:sp>
         <p:sp>
           <p:nvSpPr>
@@ -4835,6 +4860,13 @@
               </a:ext>
             </a:extLst>
           </p:spPr>
+          <p:txBody>
+            <a:bodyPr/>
+            <a:lstStyle/>
+            <a:p>
+              <a:endParaRPr lang="en-US"/>
+            </a:p>
+          </p:txBody>
         </p:sp>
         <p:sp>
           <p:nvSpPr>
@@ -4888,6 +4920,13 @@
               </a:ext>
             </a:extLst>
           </p:spPr>
+          <p:txBody>
+            <a:bodyPr/>
+            <a:lstStyle/>
+            <a:p>
+              <a:endParaRPr lang="en-US"/>
+            </a:p>
+          </p:txBody>
         </p:sp>
         <p:sp>
           <p:nvSpPr>
@@ -4941,6 +4980,13 @@
               </a:ext>
             </a:extLst>
           </p:spPr>
+          <p:txBody>
+            <a:bodyPr/>
+            <a:lstStyle/>
+            <a:p>
+              <a:endParaRPr lang="en-US"/>
+            </a:p>
+          </p:txBody>
         </p:sp>
         <p:sp>
           <p:nvSpPr>
@@ -4994,6 +5040,13 @@
               </a:ext>
             </a:extLst>
           </p:spPr>
+          <p:txBody>
+            <a:bodyPr/>
+            <a:lstStyle/>
+            <a:p>
+              <a:endParaRPr lang="en-US"/>
+            </a:p>
+          </p:txBody>
         </p:sp>
         <p:sp>
           <p:nvSpPr>
@@ -5047,6 +5100,13 @@
               </a:ext>
             </a:extLst>
           </p:spPr>
+          <p:txBody>
+            <a:bodyPr/>
+            <a:lstStyle/>
+            <a:p>
+              <a:endParaRPr lang="en-US"/>
+            </a:p>
+          </p:txBody>
         </p:sp>
         <p:sp>
           <p:nvSpPr>
@@ -5100,6 +5160,13 @@
               </a:ext>
             </a:extLst>
           </p:spPr>
+          <p:txBody>
+            <a:bodyPr/>
+            <a:lstStyle/>
+            <a:p>
+              <a:endParaRPr lang="en-US"/>
+            </a:p>
+          </p:txBody>
         </p:sp>
         <p:sp>
           <p:nvSpPr>
@@ -5153,6 +5220,13 @@
               </a:ext>
             </a:extLst>
           </p:spPr>
+          <p:txBody>
+            <a:bodyPr/>
+            <a:lstStyle/>
+            <a:p>
+              <a:endParaRPr lang="en-US"/>
+            </a:p>
+          </p:txBody>
         </p:sp>
         <p:sp>
           <p:nvSpPr>
@@ -5206,6 +5280,13 @@
               </a:ext>
             </a:extLst>
           </p:spPr>
+          <p:txBody>
+            <a:bodyPr/>
+            <a:lstStyle/>
+            <a:p>
+              <a:endParaRPr lang="en-US"/>
+            </a:p>
+          </p:txBody>
         </p:sp>
         <p:sp>
           <p:nvSpPr>
@@ -5259,6 +5340,13 @@
               </a:ext>
             </a:extLst>
           </p:spPr>
+          <p:txBody>
+            <a:bodyPr/>
+            <a:lstStyle/>
+            <a:p>
+              <a:endParaRPr lang="en-US"/>
+            </a:p>
+          </p:txBody>
         </p:sp>
         <p:sp>
           <p:nvSpPr>
@@ -5312,6 +5400,13 @@
               </a:ext>
             </a:extLst>
           </p:spPr>
+          <p:txBody>
+            <a:bodyPr/>
+            <a:lstStyle/>
+            <a:p>
+              <a:endParaRPr lang="en-US"/>
+            </a:p>
+          </p:txBody>
         </p:sp>
         <p:sp>
           <p:nvSpPr>
@@ -5365,6 +5460,13 @@
               </a:ext>
             </a:extLst>
           </p:spPr>
+          <p:txBody>
+            <a:bodyPr/>
+            <a:lstStyle/>
+            <a:p>
+              <a:endParaRPr lang="en-US"/>
+            </a:p>
+          </p:txBody>
         </p:sp>
         <p:sp>
           <p:nvSpPr>
@@ -5418,6 +5520,13 @@
               </a:ext>
             </a:extLst>
           </p:spPr>
+          <p:txBody>
+            <a:bodyPr/>
+            <a:lstStyle/>
+            <a:p>
+              <a:endParaRPr lang="en-US"/>
+            </a:p>
+          </p:txBody>
         </p:sp>
         <p:sp>
           <p:nvSpPr>
@@ -5471,6 +5580,13 @@
               </a:ext>
             </a:extLst>
           </p:spPr>
+          <p:txBody>
+            <a:bodyPr/>
+            <a:lstStyle/>
+            <a:p>
+              <a:endParaRPr lang="en-US"/>
+            </a:p>
+          </p:txBody>
         </p:sp>
         <p:sp>
           <p:nvSpPr>
@@ -5524,6 +5640,13 @@
               </a:ext>
             </a:extLst>
           </p:spPr>
+          <p:txBody>
+            <a:bodyPr/>
+            <a:lstStyle/>
+            <a:p>
+              <a:endParaRPr lang="en-US"/>
+            </a:p>
+          </p:txBody>
         </p:sp>
         <p:sp>
           <p:nvSpPr>
@@ -5577,6 +5700,13 @@
               </a:ext>
             </a:extLst>
           </p:spPr>
+          <p:txBody>
+            <a:bodyPr/>
+            <a:lstStyle/>
+            <a:p>
+              <a:endParaRPr lang="en-US"/>
+            </a:p>
+          </p:txBody>
         </p:sp>
         <p:sp>
           <p:nvSpPr>
@@ -5630,6 +5760,13 @@
               </a:ext>
             </a:extLst>
           </p:spPr>
+          <p:txBody>
+            <a:bodyPr/>
+            <a:lstStyle/>
+            <a:p>
+              <a:endParaRPr lang="en-US"/>
+            </a:p>
+          </p:txBody>
         </p:sp>
         <p:sp>
           <p:nvSpPr>
@@ -5683,6 +5820,13 @@
               </a:ext>
             </a:extLst>
           </p:spPr>
+          <p:txBody>
+            <a:bodyPr/>
+            <a:lstStyle/>
+            <a:p>
+              <a:endParaRPr lang="en-US"/>
+            </a:p>
+          </p:txBody>
         </p:sp>
         <p:sp>
           <p:nvSpPr>
@@ -5736,6 +5880,13 @@
               </a:ext>
             </a:extLst>
           </p:spPr>
+          <p:txBody>
+            <a:bodyPr/>
+            <a:lstStyle/>
+            <a:p>
+              <a:endParaRPr lang="en-US"/>
+            </a:p>
+          </p:txBody>
         </p:sp>
         <p:sp>
           <p:nvSpPr>
@@ -5789,6 +5940,13 @@
               </a:ext>
             </a:extLst>
           </p:spPr>
+          <p:txBody>
+            <a:bodyPr/>
+            <a:lstStyle/>
+            <a:p>
+              <a:endParaRPr lang="en-US"/>
+            </a:p>
+          </p:txBody>
         </p:sp>
       </p:grpSp>
       <p:grpSp>
@@ -5842,6 +6000,13 @@
               <a:schemeClr val="lt1"/>
             </a:fontRef>
           </p:style>
+          <p:txBody>
+            <a:bodyPr/>
+            <a:lstStyle/>
+            <a:p>
+              <a:endParaRPr lang="en-US"/>
+            </a:p>
+          </p:txBody>
         </p:sp>
         <p:sp>
           <p:nvSpPr>
@@ -5880,6 +6045,13 @@
               <a:schemeClr val="lt1"/>
             </a:fontRef>
           </p:style>
+          <p:txBody>
+            <a:bodyPr/>
+            <a:lstStyle/>
+            <a:p>
+              <a:endParaRPr lang="en-US"/>
+            </a:p>
+          </p:txBody>
         </p:sp>
         <p:sp>
           <p:nvSpPr>
@@ -5918,6 +6090,13 @@
               <a:schemeClr val="lt1"/>
             </a:fontRef>
           </p:style>
+          <p:txBody>
+            <a:bodyPr/>
+            <a:lstStyle/>
+            <a:p>
+              <a:endParaRPr lang="en-US"/>
+            </a:p>
+          </p:txBody>
         </p:sp>
       </p:grpSp>
       <p:sp>
@@ -6184,6 +6363,13 @@
               </a:ext>
             </a:extLst>
           </p:spPr>
+          <p:txBody>
+            <a:bodyPr/>
+            <a:lstStyle/>
+            <a:p>
+              <a:endParaRPr lang="en-US"/>
+            </a:p>
+          </p:txBody>
         </p:sp>
         <p:sp>
           <p:nvSpPr>
@@ -6252,6 +6438,13 @@
               </a:ext>
             </a:extLst>
           </p:spPr>
+          <p:txBody>
+            <a:bodyPr/>
+            <a:lstStyle/>
+            <a:p>
+              <a:endParaRPr lang="en-US"/>
+            </a:p>
+          </p:txBody>
         </p:sp>
         <p:sp>
           <p:nvSpPr>
@@ -6325,6 +6518,13 @@
               </a:ext>
             </a:extLst>
           </p:spPr>
+          <p:txBody>
+            <a:bodyPr/>
+            <a:lstStyle/>
+            <a:p>
+              <a:endParaRPr lang="en-US"/>
+            </a:p>
+          </p:txBody>
         </p:sp>
         <p:sp>
           <p:nvSpPr>
@@ -6388,6 +6588,13 @@
               </a:ext>
             </a:extLst>
           </p:spPr>
+          <p:txBody>
+            <a:bodyPr/>
+            <a:lstStyle/>
+            <a:p>
+              <a:endParaRPr lang="en-US"/>
+            </a:p>
+          </p:txBody>
         </p:sp>
         <p:sp>
           <p:nvSpPr>
@@ -6441,6 +6648,13 @@
               </a:ext>
             </a:extLst>
           </p:spPr>
+          <p:txBody>
+            <a:bodyPr/>
+            <a:lstStyle/>
+            <a:p>
+              <a:endParaRPr lang="en-US"/>
+            </a:p>
+          </p:txBody>
         </p:sp>
         <p:sp>
           <p:nvSpPr>
@@ -6504,6 +6718,13 @@
               </a:ext>
             </a:extLst>
           </p:spPr>
+          <p:txBody>
+            <a:bodyPr/>
+            <a:lstStyle/>
+            <a:p>
+              <a:endParaRPr lang="en-US"/>
+            </a:p>
+          </p:txBody>
         </p:sp>
         <p:sp>
           <p:nvSpPr>
@@ -6562,6 +6783,13 @@
               </a:ext>
             </a:extLst>
           </p:spPr>
+          <p:txBody>
+            <a:bodyPr/>
+            <a:lstStyle/>
+            <a:p>
+              <a:endParaRPr lang="en-US"/>
+            </a:p>
+          </p:txBody>
         </p:sp>
         <p:sp>
           <p:nvSpPr>
@@ -6615,6 +6843,13 @@
               </a:ext>
             </a:extLst>
           </p:spPr>
+          <p:txBody>
+            <a:bodyPr/>
+            <a:lstStyle/>
+            <a:p>
+              <a:endParaRPr lang="en-US"/>
+            </a:p>
+          </p:txBody>
         </p:sp>
         <p:sp>
           <p:nvSpPr>
@@ -6673,6 +6908,13 @@
               </a:ext>
             </a:extLst>
           </p:spPr>
+          <p:txBody>
+            <a:bodyPr/>
+            <a:lstStyle/>
+            <a:p>
+              <a:endParaRPr lang="en-US"/>
+            </a:p>
+          </p:txBody>
         </p:sp>
         <p:sp>
           <p:nvSpPr>
@@ -6726,6 +6968,13 @@
               </a:ext>
             </a:extLst>
           </p:spPr>
+          <p:txBody>
+            <a:bodyPr/>
+            <a:lstStyle/>
+            <a:p>
+              <a:endParaRPr lang="en-US"/>
+            </a:p>
+          </p:txBody>
         </p:sp>
         <p:sp>
           <p:nvSpPr>
@@ -6784,6 +7033,13 @@
               </a:ext>
             </a:extLst>
           </p:spPr>
+          <p:txBody>
+            <a:bodyPr/>
+            <a:lstStyle/>
+            <a:p>
+              <a:endParaRPr lang="en-US"/>
+            </a:p>
+          </p:txBody>
         </p:sp>
         <p:sp>
           <p:nvSpPr>
@@ -6837,6 +7093,13 @@
               </a:ext>
             </a:extLst>
           </p:spPr>
+          <p:txBody>
+            <a:bodyPr/>
+            <a:lstStyle/>
+            <a:p>
+              <a:endParaRPr lang="en-US"/>
+            </a:p>
+          </p:txBody>
         </p:sp>
         <p:sp>
           <p:nvSpPr>
@@ -6895,6 +7158,13 @@
               </a:ext>
             </a:extLst>
           </p:spPr>
+          <p:txBody>
+            <a:bodyPr/>
+            <a:lstStyle/>
+            <a:p>
+              <a:endParaRPr lang="en-US"/>
+            </a:p>
+          </p:txBody>
         </p:sp>
         <p:sp>
           <p:nvSpPr>
@@ -6953,6 +7223,13 @@
               </a:ext>
             </a:extLst>
           </p:spPr>
+          <p:txBody>
+            <a:bodyPr/>
+            <a:lstStyle/>
+            <a:p>
+              <a:endParaRPr lang="en-US"/>
+            </a:p>
+          </p:txBody>
         </p:sp>
         <p:sp>
           <p:nvSpPr>
@@ -7011,6 +7288,13 @@
               </a:ext>
             </a:extLst>
           </p:spPr>
+          <p:txBody>
+            <a:bodyPr/>
+            <a:lstStyle/>
+            <a:p>
+              <a:endParaRPr lang="en-US"/>
+            </a:p>
+          </p:txBody>
         </p:sp>
         <p:sp>
           <p:nvSpPr>
@@ -7064,6 +7348,13 @@
               </a:ext>
             </a:extLst>
           </p:spPr>
+          <p:txBody>
+            <a:bodyPr/>
+            <a:lstStyle/>
+            <a:p>
+              <a:endParaRPr lang="en-US"/>
+            </a:p>
+          </p:txBody>
         </p:sp>
         <p:sp>
           <p:nvSpPr>
@@ -7117,6 +7408,13 @@
               </a:ext>
             </a:extLst>
           </p:spPr>
+          <p:txBody>
+            <a:bodyPr/>
+            <a:lstStyle/>
+            <a:p>
+              <a:endParaRPr lang="en-US"/>
+            </a:p>
+          </p:txBody>
         </p:sp>
         <p:sp>
           <p:nvSpPr>
@@ -7170,6 +7468,13 @@
               </a:ext>
             </a:extLst>
           </p:spPr>
+          <p:txBody>
+            <a:bodyPr/>
+            <a:lstStyle/>
+            <a:p>
+              <a:endParaRPr lang="en-US"/>
+            </a:p>
+          </p:txBody>
         </p:sp>
         <p:sp>
           <p:nvSpPr>
@@ -7223,6 +7528,13 @@
               </a:ext>
             </a:extLst>
           </p:spPr>
+          <p:txBody>
+            <a:bodyPr/>
+            <a:lstStyle/>
+            <a:p>
+              <a:endParaRPr lang="en-US"/>
+            </a:p>
+          </p:txBody>
         </p:sp>
       </p:grpSp>
       <p:grpSp>
@@ -7276,6 +7588,13 @@
               <a:schemeClr val="lt1"/>
             </a:fontRef>
           </p:style>
+          <p:txBody>
+            <a:bodyPr/>
+            <a:lstStyle/>
+            <a:p>
+              <a:endParaRPr lang="en-US"/>
+            </a:p>
+          </p:txBody>
         </p:sp>
         <p:sp>
           <p:nvSpPr>
@@ -7314,6 +7633,13 @@
               <a:schemeClr val="lt1"/>
             </a:fontRef>
           </p:style>
+          <p:txBody>
+            <a:bodyPr/>
+            <a:lstStyle/>
+            <a:p>
+              <a:endParaRPr lang="en-US"/>
+            </a:p>
+          </p:txBody>
         </p:sp>
         <p:sp>
           <p:nvSpPr>
@@ -7352,6 +7678,13 @@
               <a:schemeClr val="lt1"/>
             </a:fontRef>
           </p:style>
+          <p:txBody>
+            <a:bodyPr/>
+            <a:lstStyle/>
+            <a:p>
+              <a:endParaRPr lang="en-US"/>
+            </a:p>
+          </p:txBody>
         </p:sp>
       </p:grpSp>
       <p:sp>
@@ -7686,6 +8019,13 @@
               </a:ext>
             </a:extLst>
           </p:spPr>
+          <p:txBody>
+            <a:bodyPr/>
+            <a:lstStyle/>
+            <a:p>
+              <a:endParaRPr lang="en-US"/>
+            </a:p>
+          </p:txBody>
         </p:sp>
         <p:sp>
           <p:nvSpPr>
@@ -7739,6 +8079,13 @@
               </a:ext>
             </a:extLst>
           </p:spPr>
+          <p:txBody>
+            <a:bodyPr/>
+            <a:lstStyle/>
+            <a:p>
+              <a:endParaRPr lang="en-US"/>
+            </a:p>
+          </p:txBody>
         </p:sp>
         <p:sp>
           <p:nvSpPr>
@@ -7792,6 +8139,13 @@
               </a:ext>
             </a:extLst>
           </p:spPr>
+          <p:txBody>
+            <a:bodyPr/>
+            <a:lstStyle/>
+            <a:p>
+              <a:endParaRPr lang="en-US"/>
+            </a:p>
+          </p:txBody>
         </p:sp>
         <p:sp>
           <p:nvSpPr>
@@ -7845,6 +8199,13 @@
               </a:ext>
             </a:extLst>
           </p:spPr>
+          <p:txBody>
+            <a:bodyPr/>
+            <a:lstStyle/>
+            <a:p>
+              <a:endParaRPr lang="en-US"/>
+            </a:p>
+          </p:txBody>
         </p:sp>
         <p:sp>
           <p:nvSpPr>
@@ -7898,6 +8259,13 @@
               </a:ext>
             </a:extLst>
           </p:spPr>
+          <p:txBody>
+            <a:bodyPr/>
+            <a:lstStyle/>
+            <a:p>
+              <a:endParaRPr lang="en-US"/>
+            </a:p>
+          </p:txBody>
         </p:sp>
         <p:sp>
           <p:nvSpPr>
@@ -7951,6 +8319,13 @@
               </a:ext>
             </a:extLst>
           </p:spPr>
+          <p:txBody>
+            <a:bodyPr/>
+            <a:lstStyle/>
+            <a:p>
+              <a:endParaRPr lang="en-US"/>
+            </a:p>
+          </p:txBody>
         </p:sp>
         <p:sp>
           <p:nvSpPr>
@@ -8004,6 +8379,13 @@
               </a:ext>
             </a:extLst>
           </p:spPr>
+          <p:txBody>
+            <a:bodyPr/>
+            <a:lstStyle/>
+            <a:p>
+              <a:endParaRPr lang="en-US"/>
+            </a:p>
+          </p:txBody>
         </p:sp>
         <p:sp>
           <p:nvSpPr>
@@ -8057,6 +8439,13 @@
               </a:ext>
             </a:extLst>
           </p:spPr>
+          <p:txBody>
+            <a:bodyPr/>
+            <a:lstStyle/>
+            <a:p>
+              <a:endParaRPr lang="en-US"/>
+            </a:p>
+          </p:txBody>
         </p:sp>
         <p:sp>
           <p:nvSpPr>
@@ -8110,6 +8499,13 @@
               </a:ext>
             </a:extLst>
           </p:spPr>
+          <p:txBody>
+            <a:bodyPr/>
+            <a:lstStyle/>
+            <a:p>
+              <a:endParaRPr lang="en-US"/>
+            </a:p>
+          </p:txBody>
         </p:sp>
         <p:sp>
           <p:nvSpPr>
@@ -8163,6 +8559,13 @@
               </a:ext>
             </a:extLst>
           </p:spPr>
+          <p:txBody>
+            <a:bodyPr/>
+            <a:lstStyle/>
+            <a:p>
+              <a:endParaRPr lang="en-US"/>
+            </a:p>
+          </p:txBody>
         </p:sp>
         <p:sp>
           <p:nvSpPr>
@@ -8216,6 +8619,13 @@
               </a:ext>
             </a:extLst>
           </p:spPr>
+          <p:txBody>
+            <a:bodyPr/>
+            <a:lstStyle/>
+            <a:p>
+              <a:endParaRPr lang="en-US"/>
+            </a:p>
+          </p:txBody>
         </p:sp>
         <p:sp>
           <p:nvSpPr>
@@ -8269,6 +8679,13 @@
               </a:ext>
             </a:extLst>
           </p:spPr>
+          <p:txBody>
+            <a:bodyPr/>
+            <a:lstStyle/>
+            <a:p>
+              <a:endParaRPr lang="en-US"/>
+            </a:p>
+          </p:txBody>
         </p:sp>
         <p:sp>
           <p:nvSpPr>
@@ -8322,6 +8739,13 @@
               </a:ext>
             </a:extLst>
           </p:spPr>
+          <p:txBody>
+            <a:bodyPr/>
+            <a:lstStyle/>
+            <a:p>
+              <a:endParaRPr lang="en-US"/>
+            </a:p>
+          </p:txBody>
         </p:sp>
         <p:sp>
           <p:nvSpPr>
@@ -8375,6 +8799,13 @@
               </a:ext>
             </a:extLst>
           </p:spPr>
+          <p:txBody>
+            <a:bodyPr/>
+            <a:lstStyle/>
+            <a:p>
+              <a:endParaRPr lang="en-US"/>
+            </a:p>
+          </p:txBody>
         </p:sp>
         <p:sp>
           <p:nvSpPr>
@@ -8428,6 +8859,13 @@
               </a:ext>
             </a:extLst>
           </p:spPr>
+          <p:txBody>
+            <a:bodyPr/>
+            <a:lstStyle/>
+            <a:p>
+              <a:endParaRPr lang="en-US"/>
+            </a:p>
+          </p:txBody>
         </p:sp>
         <p:sp>
           <p:nvSpPr>
@@ -8481,6 +8919,13 @@
               </a:ext>
             </a:extLst>
           </p:spPr>
+          <p:txBody>
+            <a:bodyPr/>
+            <a:lstStyle/>
+            <a:p>
+              <a:endParaRPr lang="en-US"/>
+            </a:p>
+          </p:txBody>
         </p:sp>
         <p:sp>
           <p:nvSpPr>
@@ -8534,6 +8979,13 @@
               </a:ext>
             </a:extLst>
           </p:spPr>
+          <p:txBody>
+            <a:bodyPr/>
+            <a:lstStyle/>
+            <a:p>
+              <a:endParaRPr lang="en-US"/>
+            </a:p>
+          </p:txBody>
         </p:sp>
         <p:sp>
           <p:nvSpPr>
@@ -8587,6 +9039,13 @@
               </a:ext>
             </a:extLst>
           </p:spPr>
+          <p:txBody>
+            <a:bodyPr/>
+            <a:lstStyle/>
+            <a:p>
+              <a:endParaRPr lang="en-US"/>
+            </a:p>
+          </p:txBody>
         </p:sp>
         <p:sp>
           <p:nvSpPr>
@@ -8640,6 +9099,13 @@
               </a:ext>
             </a:extLst>
           </p:spPr>
+          <p:txBody>
+            <a:bodyPr/>
+            <a:lstStyle/>
+            <a:p>
+              <a:endParaRPr lang="en-US"/>
+            </a:p>
+          </p:txBody>
         </p:sp>
         <p:sp>
           <p:nvSpPr>
@@ -8693,6 +9159,13 @@
               </a:ext>
             </a:extLst>
           </p:spPr>
+          <p:txBody>
+            <a:bodyPr/>
+            <a:lstStyle/>
+            <a:p>
+              <a:endParaRPr lang="en-US"/>
+            </a:p>
+          </p:txBody>
         </p:sp>
         <p:sp>
           <p:nvSpPr>
@@ -8746,6 +9219,13 @@
               </a:ext>
             </a:extLst>
           </p:spPr>
+          <p:txBody>
+            <a:bodyPr/>
+            <a:lstStyle/>
+            <a:p>
+              <a:endParaRPr lang="en-US"/>
+            </a:p>
+          </p:txBody>
         </p:sp>
       </p:grpSp>
       <p:grpSp>
@@ -8799,6 +9279,13 @@
               <a:schemeClr val="lt1"/>
             </a:fontRef>
           </p:style>
+          <p:txBody>
+            <a:bodyPr/>
+            <a:lstStyle/>
+            <a:p>
+              <a:endParaRPr lang="en-US"/>
+            </a:p>
+          </p:txBody>
         </p:sp>
         <p:sp>
           <p:nvSpPr>
@@ -8837,6 +9324,13 @@
               <a:schemeClr val="lt1"/>
             </a:fontRef>
           </p:style>
+          <p:txBody>
+            <a:bodyPr/>
+            <a:lstStyle/>
+            <a:p>
+              <a:endParaRPr lang="en-US"/>
+            </a:p>
+          </p:txBody>
         </p:sp>
         <p:sp>
           <p:nvSpPr>
@@ -8875,6 +9369,13 @@
               <a:schemeClr val="lt1"/>
             </a:fontRef>
           </p:style>
+          <p:txBody>
+            <a:bodyPr/>
+            <a:lstStyle/>
+            <a:p>
+              <a:endParaRPr lang="en-US"/>
+            </a:p>
+          </p:txBody>
         </p:sp>
       </p:grpSp>
       <p:sp>
@@ -9198,6 +9699,13 @@
               </a:ext>
             </a:extLst>
           </p:spPr>
+          <p:txBody>
+            <a:bodyPr/>
+            <a:lstStyle/>
+            <a:p>
+              <a:endParaRPr lang="en-US"/>
+            </a:p>
+          </p:txBody>
         </p:sp>
         <p:sp>
           <p:nvSpPr>
@@ -9251,6 +9759,13 @@
               </a:ext>
             </a:extLst>
           </p:spPr>
+          <p:txBody>
+            <a:bodyPr/>
+            <a:lstStyle/>
+            <a:p>
+              <a:endParaRPr lang="en-US"/>
+            </a:p>
+          </p:txBody>
         </p:sp>
         <p:sp>
           <p:nvSpPr>
@@ -9304,6 +9819,13 @@
               </a:ext>
             </a:extLst>
           </p:spPr>
+          <p:txBody>
+            <a:bodyPr/>
+            <a:lstStyle/>
+            <a:p>
+              <a:endParaRPr lang="en-US"/>
+            </a:p>
+          </p:txBody>
         </p:sp>
         <p:sp>
           <p:nvSpPr>
@@ -9357,6 +9879,13 @@
               </a:ext>
             </a:extLst>
           </p:spPr>
+          <p:txBody>
+            <a:bodyPr/>
+            <a:lstStyle/>
+            <a:p>
+              <a:endParaRPr lang="en-US"/>
+            </a:p>
+          </p:txBody>
         </p:sp>
         <p:sp>
           <p:nvSpPr>
@@ -9410,6 +9939,13 @@
               </a:ext>
             </a:extLst>
           </p:spPr>
+          <p:txBody>
+            <a:bodyPr/>
+            <a:lstStyle/>
+            <a:p>
+              <a:endParaRPr lang="en-US"/>
+            </a:p>
+          </p:txBody>
         </p:sp>
         <p:sp>
           <p:nvSpPr>
@@ -9463,6 +9999,13 @@
               </a:ext>
             </a:extLst>
           </p:spPr>
+          <p:txBody>
+            <a:bodyPr/>
+            <a:lstStyle/>
+            <a:p>
+              <a:endParaRPr lang="en-US"/>
+            </a:p>
+          </p:txBody>
         </p:sp>
         <p:sp>
           <p:nvSpPr>
@@ -9516,6 +10059,13 @@
               </a:ext>
             </a:extLst>
           </p:spPr>
+          <p:txBody>
+            <a:bodyPr/>
+            <a:lstStyle/>
+            <a:p>
+              <a:endParaRPr lang="en-US"/>
+            </a:p>
+          </p:txBody>
         </p:sp>
         <p:sp>
           <p:nvSpPr>
@@ -9569,6 +10119,13 @@
               </a:ext>
             </a:extLst>
           </p:spPr>
+          <p:txBody>
+            <a:bodyPr/>
+            <a:lstStyle/>
+            <a:p>
+              <a:endParaRPr lang="en-US"/>
+            </a:p>
+          </p:txBody>
         </p:sp>
         <p:sp>
           <p:nvSpPr>
@@ -9622,6 +10179,13 @@
               </a:ext>
             </a:extLst>
           </p:spPr>
+          <p:txBody>
+            <a:bodyPr/>
+            <a:lstStyle/>
+            <a:p>
+              <a:endParaRPr lang="en-US"/>
+            </a:p>
+          </p:txBody>
         </p:sp>
         <p:sp>
           <p:nvSpPr>
@@ -9675,6 +10239,13 @@
               </a:ext>
             </a:extLst>
           </p:spPr>
+          <p:txBody>
+            <a:bodyPr/>
+            <a:lstStyle/>
+            <a:p>
+              <a:endParaRPr lang="en-US"/>
+            </a:p>
+          </p:txBody>
         </p:sp>
         <p:sp>
           <p:nvSpPr>
@@ -9728,6 +10299,13 @@
               </a:ext>
             </a:extLst>
           </p:spPr>
+          <p:txBody>
+            <a:bodyPr/>
+            <a:lstStyle/>
+            <a:p>
+              <a:endParaRPr lang="en-US"/>
+            </a:p>
+          </p:txBody>
         </p:sp>
         <p:sp>
           <p:nvSpPr>
@@ -9781,6 +10359,13 @@
               </a:ext>
             </a:extLst>
           </p:spPr>
+          <p:txBody>
+            <a:bodyPr/>
+            <a:lstStyle/>
+            <a:p>
+              <a:endParaRPr lang="en-US"/>
+            </a:p>
+          </p:txBody>
         </p:sp>
         <p:sp>
           <p:nvSpPr>
@@ -9834,6 +10419,13 @@
               </a:ext>
             </a:extLst>
           </p:spPr>
+          <p:txBody>
+            <a:bodyPr/>
+            <a:lstStyle/>
+            <a:p>
+              <a:endParaRPr lang="en-US"/>
+            </a:p>
+          </p:txBody>
         </p:sp>
         <p:sp>
           <p:nvSpPr>
@@ -9887,6 +10479,13 @@
               </a:ext>
             </a:extLst>
           </p:spPr>
+          <p:txBody>
+            <a:bodyPr/>
+            <a:lstStyle/>
+            <a:p>
+              <a:endParaRPr lang="en-US"/>
+            </a:p>
+          </p:txBody>
         </p:sp>
         <p:sp>
           <p:nvSpPr>
@@ -9940,6 +10539,13 @@
               </a:ext>
             </a:extLst>
           </p:spPr>
+          <p:txBody>
+            <a:bodyPr/>
+            <a:lstStyle/>
+            <a:p>
+              <a:endParaRPr lang="en-US"/>
+            </a:p>
+          </p:txBody>
         </p:sp>
         <p:sp>
           <p:nvSpPr>
@@ -9993,6 +10599,13 @@
               </a:ext>
             </a:extLst>
           </p:spPr>
+          <p:txBody>
+            <a:bodyPr/>
+            <a:lstStyle/>
+            <a:p>
+              <a:endParaRPr lang="en-US"/>
+            </a:p>
+          </p:txBody>
         </p:sp>
         <p:sp>
           <p:nvSpPr>
@@ -10046,6 +10659,13 @@
               </a:ext>
             </a:extLst>
           </p:spPr>
+          <p:txBody>
+            <a:bodyPr/>
+            <a:lstStyle/>
+            <a:p>
+              <a:endParaRPr lang="en-US"/>
+            </a:p>
+          </p:txBody>
         </p:sp>
         <p:sp>
           <p:nvSpPr>
@@ -10099,6 +10719,13 @@
               </a:ext>
             </a:extLst>
           </p:spPr>
+          <p:txBody>
+            <a:bodyPr/>
+            <a:lstStyle/>
+            <a:p>
+              <a:endParaRPr lang="en-US"/>
+            </a:p>
+          </p:txBody>
         </p:sp>
         <p:sp>
           <p:nvSpPr>
@@ -10152,6 +10779,13 @@
               </a:ext>
             </a:extLst>
           </p:spPr>
+          <p:txBody>
+            <a:bodyPr/>
+            <a:lstStyle/>
+            <a:p>
+              <a:endParaRPr lang="en-US"/>
+            </a:p>
+          </p:txBody>
         </p:sp>
         <p:sp>
           <p:nvSpPr>
@@ -10205,6 +10839,13 @@
               </a:ext>
             </a:extLst>
           </p:spPr>
+          <p:txBody>
+            <a:bodyPr/>
+            <a:lstStyle/>
+            <a:p>
+              <a:endParaRPr lang="en-US"/>
+            </a:p>
+          </p:txBody>
         </p:sp>
         <p:sp>
           <p:nvSpPr>
@@ -10258,6 +10899,13 @@
               </a:ext>
             </a:extLst>
           </p:spPr>
+          <p:txBody>
+            <a:bodyPr/>
+            <a:lstStyle/>
+            <a:p>
+              <a:endParaRPr lang="en-US"/>
+            </a:p>
+          </p:txBody>
         </p:sp>
       </p:grpSp>
       <p:grpSp>
@@ -10311,6 +10959,13 @@
               <a:schemeClr val="lt1"/>
             </a:fontRef>
           </p:style>
+          <p:txBody>
+            <a:bodyPr/>
+            <a:lstStyle/>
+            <a:p>
+              <a:endParaRPr lang="en-US"/>
+            </a:p>
+          </p:txBody>
         </p:sp>
         <p:sp>
           <p:nvSpPr>
@@ -10349,6 +11004,13 @@
               <a:schemeClr val="lt1"/>
             </a:fontRef>
           </p:style>
+          <p:txBody>
+            <a:bodyPr/>
+            <a:lstStyle/>
+            <a:p>
+              <a:endParaRPr lang="en-US"/>
+            </a:p>
+          </p:txBody>
         </p:sp>
         <p:sp>
           <p:nvSpPr>
@@ -10387,6 +11049,13 @@
               <a:schemeClr val="lt1"/>
             </a:fontRef>
           </p:style>
+          <p:txBody>
+            <a:bodyPr/>
+            <a:lstStyle/>
+            <a:p>
+              <a:endParaRPr lang="en-US"/>
+            </a:p>
+          </p:txBody>
         </p:sp>
       </p:grpSp>
       <p:sp>
@@ -13872,6 +14541,13 @@
               </a:ext>
             </a:extLst>
           </p:spPr>
+          <p:txBody>
+            <a:bodyPr/>
+            <a:lstStyle/>
+            <a:p>
+              <a:endParaRPr lang="en-US"/>
+            </a:p>
+          </p:txBody>
         </p:sp>
         <p:sp>
           <p:nvSpPr>
@@ -13940,6 +14616,13 @@
               </a:ext>
             </a:extLst>
           </p:spPr>
+          <p:txBody>
+            <a:bodyPr/>
+            <a:lstStyle/>
+            <a:p>
+              <a:endParaRPr lang="en-US"/>
+            </a:p>
+          </p:txBody>
         </p:sp>
         <p:sp>
           <p:nvSpPr>
@@ -14013,6 +14696,13 @@
               </a:ext>
             </a:extLst>
           </p:spPr>
+          <p:txBody>
+            <a:bodyPr/>
+            <a:lstStyle/>
+            <a:p>
+              <a:endParaRPr lang="en-US"/>
+            </a:p>
+          </p:txBody>
         </p:sp>
         <p:sp>
           <p:nvSpPr>
@@ -14076,6 +14766,13 @@
               </a:ext>
             </a:extLst>
           </p:spPr>
+          <p:txBody>
+            <a:bodyPr/>
+            <a:lstStyle/>
+            <a:p>
+              <a:endParaRPr lang="en-US"/>
+            </a:p>
+          </p:txBody>
         </p:sp>
         <p:sp>
           <p:nvSpPr>
@@ -14129,6 +14826,13 @@
               </a:ext>
             </a:extLst>
           </p:spPr>
+          <p:txBody>
+            <a:bodyPr/>
+            <a:lstStyle/>
+            <a:p>
+              <a:endParaRPr lang="en-US"/>
+            </a:p>
+          </p:txBody>
         </p:sp>
         <p:sp>
           <p:nvSpPr>
@@ -14192,6 +14896,13 @@
               </a:ext>
             </a:extLst>
           </p:spPr>
+          <p:txBody>
+            <a:bodyPr/>
+            <a:lstStyle/>
+            <a:p>
+              <a:endParaRPr lang="en-US"/>
+            </a:p>
+          </p:txBody>
         </p:sp>
         <p:sp>
           <p:nvSpPr>
@@ -14250,6 +14961,13 @@
               </a:ext>
             </a:extLst>
           </p:spPr>
+          <p:txBody>
+            <a:bodyPr/>
+            <a:lstStyle/>
+            <a:p>
+              <a:endParaRPr lang="en-US"/>
+            </a:p>
+          </p:txBody>
         </p:sp>
         <p:sp>
           <p:nvSpPr>
@@ -14303,6 +15021,13 @@
               </a:ext>
             </a:extLst>
           </p:spPr>
+          <p:txBody>
+            <a:bodyPr/>
+            <a:lstStyle/>
+            <a:p>
+              <a:endParaRPr lang="en-US"/>
+            </a:p>
+          </p:txBody>
         </p:sp>
         <p:sp>
           <p:nvSpPr>
@@ -14361,6 +15086,13 @@
               </a:ext>
             </a:extLst>
           </p:spPr>
+          <p:txBody>
+            <a:bodyPr/>
+            <a:lstStyle/>
+            <a:p>
+              <a:endParaRPr lang="en-US"/>
+            </a:p>
+          </p:txBody>
         </p:sp>
         <p:sp>
           <p:nvSpPr>
@@ -14414,6 +15146,13 @@
               </a:ext>
             </a:extLst>
           </p:spPr>
+          <p:txBody>
+            <a:bodyPr/>
+            <a:lstStyle/>
+            <a:p>
+              <a:endParaRPr lang="en-US"/>
+            </a:p>
+          </p:txBody>
         </p:sp>
         <p:sp>
           <p:nvSpPr>
@@ -14472,6 +15211,13 @@
               </a:ext>
             </a:extLst>
           </p:spPr>
+          <p:txBody>
+            <a:bodyPr/>
+            <a:lstStyle/>
+            <a:p>
+              <a:endParaRPr lang="en-US"/>
+            </a:p>
+          </p:txBody>
         </p:sp>
         <p:sp>
           <p:nvSpPr>
@@ -14525,6 +15271,13 @@
               </a:ext>
             </a:extLst>
           </p:spPr>
+          <p:txBody>
+            <a:bodyPr/>
+            <a:lstStyle/>
+            <a:p>
+              <a:endParaRPr lang="en-US"/>
+            </a:p>
+          </p:txBody>
         </p:sp>
         <p:sp>
           <p:nvSpPr>
@@ -14583,6 +15336,13 @@
               </a:ext>
             </a:extLst>
           </p:spPr>
+          <p:txBody>
+            <a:bodyPr/>
+            <a:lstStyle/>
+            <a:p>
+              <a:endParaRPr lang="en-US"/>
+            </a:p>
+          </p:txBody>
         </p:sp>
         <p:sp>
           <p:nvSpPr>
@@ -14641,6 +15401,13 @@
               </a:ext>
             </a:extLst>
           </p:spPr>
+          <p:txBody>
+            <a:bodyPr/>
+            <a:lstStyle/>
+            <a:p>
+              <a:endParaRPr lang="en-US"/>
+            </a:p>
+          </p:txBody>
         </p:sp>
         <p:sp>
           <p:nvSpPr>
@@ -14699,6 +15466,13 @@
               </a:ext>
             </a:extLst>
           </p:spPr>
+          <p:txBody>
+            <a:bodyPr/>
+            <a:lstStyle/>
+            <a:p>
+              <a:endParaRPr lang="en-US"/>
+            </a:p>
+          </p:txBody>
         </p:sp>
         <p:sp>
           <p:nvSpPr>
@@ -14752,6 +15526,13 @@
               </a:ext>
             </a:extLst>
           </p:spPr>
+          <p:txBody>
+            <a:bodyPr/>
+            <a:lstStyle/>
+            <a:p>
+              <a:endParaRPr lang="en-US"/>
+            </a:p>
+          </p:txBody>
         </p:sp>
         <p:sp>
           <p:nvSpPr>
@@ -14805,6 +15586,13 @@
               </a:ext>
             </a:extLst>
           </p:spPr>
+          <p:txBody>
+            <a:bodyPr/>
+            <a:lstStyle/>
+            <a:p>
+              <a:endParaRPr lang="en-US"/>
+            </a:p>
+          </p:txBody>
         </p:sp>
         <p:sp>
           <p:nvSpPr>
@@ -14858,6 +15646,13 @@
               </a:ext>
             </a:extLst>
           </p:spPr>
+          <p:txBody>
+            <a:bodyPr/>
+            <a:lstStyle/>
+            <a:p>
+              <a:endParaRPr lang="en-US"/>
+            </a:p>
+          </p:txBody>
         </p:sp>
         <p:sp>
           <p:nvSpPr>
@@ -14911,6 +15706,13 @@
               </a:ext>
             </a:extLst>
           </p:spPr>
+          <p:txBody>
+            <a:bodyPr/>
+            <a:lstStyle/>
+            <a:p>
+              <a:endParaRPr lang="en-US"/>
+            </a:p>
+          </p:txBody>
         </p:sp>
       </p:grpSp>
       <p:grpSp>
@@ -14964,6 +15766,13 @@
               <a:schemeClr val="lt1"/>
             </a:fontRef>
           </p:style>
+          <p:txBody>
+            <a:bodyPr/>
+            <a:lstStyle/>
+            <a:p>
+              <a:endParaRPr lang="en-US"/>
+            </a:p>
+          </p:txBody>
         </p:sp>
         <p:sp>
           <p:nvSpPr>
@@ -15002,6 +15811,13 @@
               <a:schemeClr val="lt1"/>
             </a:fontRef>
           </p:style>
+          <p:txBody>
+            <a:bodyPr/>
+            <a:lstStyle/>
+            <a:p>
+              <a:endParaRPr lang="en-US"/>
+            </a:p>
+          </p:txBody>
         </p:sp>
         <p:sp>
           <p:nvSpPr>
@@ -15040,6 +15856,13 @@
               <a:schemeClr val="lt1"/>
             </a:fontRef>
           </p:style>
+          <p:txBody>
+            <a:bodyPr/>
+            <a:lstStyle/>
+            <a:p>
+              <a:endParaRPr lang="en-US"/>
+            </a:p>
+          </p:txBody>
         </p:sp>
       </p:grpSp>
       <p:sp>
@@ -16108,7 +16931,198 @@
 </p:sld>
 </file>
 
-<file path=ppt/slides/slide2.xml><?xml version="1.0" encoding="utf-8"?>
+<file path=ppt/slides/slide10.xml><?xml version="1.0" encoding="utf-8"?>
+<p:sld xmlns:a="http://schemas.openxmlformats.org/drawingml/2006/main" xmlns:r="http://schemas.openxmlformats.org/officeDocument/2006/relationships" xmlns:p="http://schemas.openxmlformats.org/presentationml/2006/main">
+  <p:cSld>
+    <p:spTree>
+      <p:nvGrpSpPr>
+        <p:cNvPr id="1" name="">
+          <a:extLst>
+            <a:ext uri="{FF2B5EF4-FFF2-40B4-BE49-F238E27FC236}">
+              <a16:creationId xmlns:a16="http://schemas.microsoft.com/office/drawing/2014/main" id="{0C54E505-1D68-6DD5-1FBD-83B8E65220DA}"/>
+            </a:ext>
+          </a:extLst>
+        </p:cNvPr>
+        <p:cNvGrpSpPr/>
+        <p:nvPr/>
+      </p:nvGrpSpPr>
+      <p:grpSpPr>
+        <a:xfrm>
+          <a:off x="0" y="0"/>
+          <a:ext cx="0" cy="0"/>
+          <a:chOff x="0" y="0"/>
+          <a:chExt cx="0" cy="0"/>
+        </a:xfrm>
+      </p:grpSpPr>
+      <p:sp>
+        <p:nvSpPr>
+          <p:cNvPr id="2" name="Title 1">
+            <a:extLst>
+              <a:ext uri="{FF2B5EF4-FFF2-40B4-BE49-F238E27FC236}">
+                <a16:creationId xmlns:a16="http://schemas.microsoft.com/office/drawing/2014/main" id="{CB67D7A8-AEB9-C0ED-E3A9-F377CD4C3254}"/>
+              </a:ext>
+            </a:extLst>
+          </p:cNvPr>
+          <p:cNvSpPr>
+            <a:spLocks noGrp="1"/>
+          </p:cNvSpPr>
+          <p:nvPr>
+            <p:ph type="title"/>
+          </p:nvPr>
+        </p:nvSpPr>
+        <p:spPr/>
+        <p:txBody>
+          <a:bodyPr/>
+          <a:lstStyle/>
+          <a:p>
+            <a:r>
+              <a:rPr lang="en-CA" b="1"/>
+              <a:t>Real Word Cases</a:t>
+            </a:r>
+            <a:endParaRPr lang="en-US"/>
+          </a:p>
+        </p:txBody>
+      </p:sp>
+      <p:pic>
+        <p:nvPicPr>
+          <p:cNvPr id="4" name="Picture 3">
+            <a:extLst>
+              <a:ext uri="{FF2B5EF4-FFF2-40B4-BE49-F238E27FC236}">
+                <a16:creationId xmlns:a16="http://schemas.microsoft.com/office/drawing/2014/main" id="{3E594E95-493E-F5C9-3707-5DCFEA1BF3D8}"/>
+              </a:ext>
+            </a:extLst>
+          </p:cNvPr>
+          <p:cNvPicPr>
+            <a:picLocks noChangeAspect="1"/>
+          </p:cNvPicPr>
+          <p:nvPr/>
+        </p:nvPicPr>
+        <p:blipFill>
+          <a:blip r:embed="rId2"/>
+          <a:stretch>
+            <a:fillRect/>
+          </a:stretch>
+        </p:blipFill>
+        <p:spPr>
+          <a:xfrm>
+            <a:off x="5010150" y="814388"/>
+            <a:ext cx="6572250" cy="4518422"/>
+          </a:xfrm>
+          <a:prstGeom prst="rect">
+            <a:avLst/>
+          </a:prstGeom>
+        </p:spPr>
+      </p:pic>
+    </p:spTree>
+    <p:extLst>
+      <p:ext uri="{BB962C8B-B14F-4D97-AF65-F5344CB8AC3E}">
+        <p14:creationId xmlns:p14="http://schemas.microsoft.com/office/powerpoint/2010/main" val="138803800"/>
+      </p:ext>
+    </p:extLst>
+  </p:cSld>
+  <p:clrMapOvr>
+    <a:masterClrMapping/>
+  </p:clrMapOvr>
+</p:sld>
+</file>
+
+<file path=ppt/slides/slide11.xml><?xml version="1.0" encoding="utf-8"?>
+<p:sld xmlns:a="http://schemas.openxmlformats.org/drawingml/2006/main" xmlns:r="http://schemas.openxmlformats.org/officeDocument/2006/relationships" xmlns:p="http://schemas.openxmlformats.org/presentationml/2006/main">
+  <p:cSld>
+    <p:spTree>
+      <p:nvGrpSpPr>
+        <p:cNvPr id="1" name="">
+          <a:extLst>
+            <a:ext uri="{FF2B5EF4-FFF2-40B4-BE49-F238E27FC236}">
+              <a16:creationId xmlns:a16="http://schemas.microsoft.com/office/drawing/2014/main" id="{7A9C61E6-5A94-B3DB-77B4-961F381E5026}"/>
+            </a:ext>
+          </a:extLst>
+        </p:cNvPr>
+        <p:cNvGrpSpPr/>
+        <p:nvPr/>
+      </p:nvGrpSpPr>
+      <p:grpSpPr>
+        <a:xfrm>
+          <a:off x="0" y="0"/>
+          <a:ext cx="0" cy="0"/>
+          <a:chOff x="0" y="0"/>
+          <a:chExt cx="0" cy="0"/>
+        </a:xfrm>
+      </p:grpSpPr>
+      <p:sp>
+        <p:nvSpPr>
+          <p:cNvPr id="2" name="Title 1">
+            <a:extLst>
+              <a:ext uri="{FF2B5EF4-FFF2-40B4-BE49-F238E27FC236}">
+                <a16:creationId xmlns:a16="http://schemas.microsoft.com/office/drawing/2014/main" id="{005C87F8-22BB-CDD8-8779-117E32DCD122}"/>
+              </a:ext>
+            </a:extLst>
+          </p:cNvPr>
+          <p:cNvSpPr>
+            <a:spLocks noGrp="1"/>
+          </p:cNvSpPr>
+          <p:nvPr>
+            <p:ph type="title"/>
+          </p:nvPr>
+        </p:nvSpPr>
+        <p:spPr/>
+        <p:txBody>
+          <a:bodyPr/>
+          <a:lstStyle/>
+          <a:p>
+            <a:r>
+              <a:rPr lang="en-CA" b="1"/>
+              <a:t>Real Word Cases</a:t>
+            </a:r>
+            <a:endParaRPr lang="en-US"/>
+          </a:p>
+        </p:txBody>
+      </p:sp>
+      <p:pic>
+        <p:nvPicPr>
+          <p:cNvPr id="3" name="Picture 2">
+            <a:extLst>
+              <a:ext uri="{FF2B5EF4-FFF2-40B4-BE49-F238E27FC236}">
+                <a16:creationId xmlns:a16="http://schemas.microsoft.com/office/drawing/2014/main" id="{2767CA34-3936-777B-DD22-44A730E84FB8}"/>
+              </a:ext>
+            </a:extLst>
+          </p:cNvPr>
+          <p:cNvPicPr>
+            <a:picLocks noChangeAspect="1"/>
+          </p:cNvPicPr>
+          <p:nvPr/>
+        </p:nvPicPr>
+        <p:blipFill>
+          <a:blip r:embed="rId2"/>
+          <a:srcRect l="10945"/>
+          <a:stretch>
+            <a:fillRect/>
+          </a:stretch>
+        </p:blipFill>
+        <p:spPr>
+          <a:xfrm>
+            <a:off x="4666662" y="746194"/>
+            <a:ext cx="7307632" cy="4708199"/>
+          </a:xfrm>
+          <a:prstGeom prst="rect">
+            <a:avLst/>
+          </a:prstGeom>
+        </p:spPr>
+      </p:pic>
+    </p:spTree>
+    <p:extLst>
+      <p:ext uri="{BB962C8B-B14F-4D97-AF65-F5344CB8AC3E}">
+        <p14:creationId xmlns:p14="http://schemas.microsoft.com/office/powerpoint/2010/main" val="2467685593"/>
+      </p:ext>
+    </p:extLst>
+  </p:cSld>
+  <p:clrMapOvr>
+    <a:masterClrMapping/>
+  </p:clrMapOvr>
+</p:sld>
+</file>
+
+<file path=ppt/slides/slide12.xml><?xml version="1.0" encoding="utf-8"?>
 <p:sld xmlns:a="http://schemas.openxmlformats.org/drawingml/2006/main" xmlns:r="http://schemas.openxmlformats.org/officeDocument/2006/relationships" xmlns:p="http://schemas.openxmlformats.org/presentationml/2006/main">
   <p:cSld>
     <p:spTree>
@@ -16130,7 +17144,7 @@
           <p:cNvPr id="2" name="Title 1">
             <a:extLst>
               <a:ext uri="{FF2B5EF4-FFF2-40B4-BE49-F238E27FC236}">
-                <a16:creationId xmlns:a16="http://schemas.microsoft.com/office/drawing/2014/main" id="{C9CA9094-7E06-5F28-3D28-AD3F0FADC001}"/>
+                <a16:creationId xmlns:a16="http://schemas.microsoft.com/office/drawing/2014/main" id="{5E0D1876-A9F7-D11D-D7BC-A9EF2691934D}"/>
               </a:ext>
             </a:extLst>
           </p:cNvPr>
@@ -16141,194 +17155,33 @@
             <p:ph type="title"/>
           </p:nvPr>
         </p:nvSpPr>
-        <p:spPr/>
-        <p:txBody>
-          <a:bodyPr/>
-          <a:lstStyle/>
-          <a:p>
-            <a:r>
-              <a:rPr lang="en-US"/>
-              <a:t>Group members</a:t>
-            </a:r>
-          </a:p>
-        </p:txBody>
-      </p:sp>
-      <p:sp>
-        <p:nvSpPr>
-          <p:cNvPr id="3" name="Content Placeholder 2">
-            <a:extLst>
-              <a:ext uri="{FF2B5EF4-FFF2-40B4-BE49-F238E27FC236}">
-                <a16:creationId xmlns:a16="http://schemas.microsoft.com/office/drawing/2014/main" id="{31669D13-2AF7-23B2-22E2-B0BA0CFBB386}"/>
-              </a:ext>
-            </a:extLst>
-          </p:cNvPr>
-          <p:cNvSpPr>
-            <a:spLocks noGrp="1"/>
-          </p:cNvSpPr>
-          <p:nvPr>
-            <p:ph idx="1"/>
-          </p:nvPr>
-        </p:nvSpPr>
-        <p:spPr/>
-        <p:txBody>
-          <a:bodyPr/>
-          <a:lstStyle/>
-          <a:p>
-            <a:pPr lvl="0"/>
-            <a:r>
-              <a:rPr lang="en-CA"/>
-              <a:t>Sepanta Jazdarrehe / ID # 112488267 /  sjazdareh</a:t>
-            </a:r>
-          </a:p>
-          <a:p>
-            <a:pPr lvl="0"/>
-            <a:r>
-              <a:rPr lang="en-CA"/>
-              <a:t>Armita Kiashemshaki / ID # 039751144 / akiashemshaki</a:t>
-            </a:r>
-          </a:p>
-          <a:p>
-            <a:pPr lvl="0"/>
-            <a:r>
-              <a:rPr lang="en-CA"/>
-              <a:t>Merveille Solène Socko Damba / ID # 116470261 / mssocko-damba</a:t>
-            </a:r>
-          </a:p>
-          <a:p>
-            <a:pPr lvl="0"/>
-            <a:r>
-              <a:rPr lang="en-CA"/>
-              <a:t>Natalia Rodriguez Bogota / ID # 113986269 / Rodriguez-bogota</a:t>
-            </a:r>
-          </a:p>
-          <a:p>
-            <a:pPr marL="0" indent="0">
-              <a:buNone/>
-            </a:pPr>
-            <a:endParaRPr lang="en-US"/>
-          </a:p>
-        </p:txBody>
-      </p:sp>
-    </p:spTree>
-    <p:extLst>
-      <p:ext uri="{BB962C8B-B14F-4D97-AF65-F5344CB8AC3E}">
-        <p14:creationId xmlns:p14="http://schemas.microsoft.com/office/powerpoint/2010/main" val="742925437"/>
-      </p:ext>
-    </p:extLst>
-  </p:cSld>
-  <p:clrMapOvr>
-    <a:masterClrMapping/>
-  </p:clrMapOvr>
-</p:sld>
-</file>
-
-<file path=ppt/slides/slide3.xml><?xml version="1.0" encoding="utf-8"?>
-<p:sld xmlns:a="http://schemas.openxmlformats.org/drawingml/2006/main" xmlns:r="http://schemas.openxmlformats.org/officeDocument/2006/relationships" xmlns:p="http://schemas.openxmlformats.org/presentationml/2006/main">
-  <p:cSld>
-    <p:spTree>
-      <p:nvGrpSpPr>
-        <p:cNvPr id="1" name=""/>
-        <p:cNvGrpSpPr/>
-        <p:nvPr/>
-      </p:nvGrpSpPr>
-      <p:grpSpPr>
-        <a:xfrm>
-          <a:off x="0" y="0"/>
-          <a:ext cx="0" cy="0"/>
-          <a:chOff x="0" y="0"/>
-          <a:chExt cx="0" cy="0"/>
-        </a:xfrm>
-      </p:grpSpPr>
-      <p:sp>
-        <p:nvSpPr>
-          <p:cNvPr id="2" name="Title 1">
-            <a:extLst>
-              <a:ext uri="{FF2B5EF4-FFF2-40B4-BE49-F238E27FC236}">
-                <a16:creationId xmlns:a16="http://schemas.microsoft.com/office/drawing/2014/main" id="{6A2CF313-B230-7B58-08CD-2A120CB34542}"/>
-              </a:ext>
-            </a:extLst>
-          </p:cNvPr>
-          <p:cNvSpPr>
-            <a:spLocks noGrp="1"/>
-          </p:cNvSpPr>
-          <p:nvPr>
-            <p:ph type="title"/>
-          </p:nvPr>
-        </p:nvSpPr>
-        <p:spPr/>
+        <p:spPr>
+          <a:xfrm>
+            <a:off x="3350888" y="2409581"/>
+            <a:ext cx="5490224" cy="1689390"/>
+          </a:xfrm>
+        </p:spPr>
         <p:txBody>
           <a:bodyPr>
-            <a:noAutofit/>
+            <a:normAutofit/>
           </a:bodyPr>
           <a:lstStyle/>
           <a:p>
             <a:r>
-              <a:rPr lang="en-CA" sz="3200" b="1"/>
-              <a:t>Introduction</a:t>
+              <a:rPr lang="en-CA" b="1"/>
+              <a:t>Evolution of U.S. AI Regulation</a:t>
             </a:r>
-            <a:br>
-              <a:rPr lang="en-CA" sz="3200"/>
-            </a:br>
-            <a:endParaRPr lang="en-US" sz="3200"/>
-          </a:p>
-        </p:txBody>
-      </p:sp>
-      <p:sp>
-        <p:nvSpPr>
-          <p:cNvPr id="3" name="Content Placeholder 2">
-            <a:extLst>
-              <a:ext uri="{FF2B5EF4-FFF2-40B4-BE49-F238E27FC236}">
-                <a16:creationId xmlns:a16="http://schemas.microsoft.com/office/drawing/2014/main" id="{0B157E38-B330-A586-14A3-9B3804F39CDF}"/>
-              </a:ext>
-            </a:extLst>
-          </p:cNvPr>
-          <p:cNvSpPr>
-            <a:spLocks noGrp="1"/>
-          </p:cNvSpPr>
-          <p:nvPr>
-            <p:ph idx="1"/>
-          </p:nvPr>
-        </p:nvSpPr>
-        <p:spPr/>
-        <p:txBody>
-          <a:bodyPr/>
-          <a:lstStyle/>
-          <a:p>
-            <a:r>
-              <a:rPr lang="en-CA" sz="3200"/>
-              <a:t>AI Autonomy </a:t>
-            </a:r>
-          </a:p>
-          <a:p>
-            <a:r>
-              <a:rPr lang="en-CA" sz="3200"/>
-              <a:t>Cybersecurity </a:t>
-            </a:r>
-          </a:p>
-          <a:p>
-            <a:r>
-              <a:rPr lang="en-CA" sz="3200"/>
-              <a:t>Legal Responsibility </a:t>
-            </a:r>
-          </a:p>
-          <a:p>
-            <a:r>
-              <a:rPr lang="en-CA" sz="3200"/>
-              <a:t>Government Regulation</a:t>
-            </a:r>
-          </a:p>
-          <a:p>
             <a:endParaRPr lang="en-US"/>
           </a:p>
         </p:txBody>
       </p:sp>
       <p:pic>
         <p:nvPicPr>
-          <p:cNvPr id="4" name="Audio Recording Oct 21, 2026 at 5:22:00 AM">
+          <p:cNvPr id="4" name="Audio Recording Oct 21, 2026 at 4:54:21 AM">
             <a:hlinkClick r:id="" action="ppaction://media"/>
             <a:extLst>
               <a:ext uri="{FF2B5EF4-FFF2-40B4-BE49-F238E27FC236}">
-                <a16:creationId xmlns:a16="http://schemas.microsoft.com/office/drawing/2014/main" id="{ED560B19-E8AE-72BB-D5AA-10C0B21C028C}"/>
+                <a16:creationId xmlns:a16="http://schemas.microsoft.com/office/drawing/2014/main" id="{5C9C8320-EF5B-8A64-5266-821A7971BBBB}"/>
               </a:ext>
             </a:extLst>
           </p:cNvPr>
@@ -16363,195 +17216,7 @@
     </p:spTree>
     <p:extLst>
       <p:ext uri="{BB962C8B-B14F-4D97-AF65-F5344CB8AC3E}">
-        <p14:creationId xmlns:p14="http://schemas.microsoft.com/office/powerpoint/2010/main" val="4264231756"/>
-      </p:ext>
-    </p:extLst>
-  </p:cSld>
-  <p:clrMapOvr>
-    <a:masterClrMapping/>
-  </p:clrMapOvr>
-  <p:timing>
-    <p:tnLst>
-      <p:par>
-        <p:cTn id="1" dur="indefinite" restart="never" nodeType="tmRoot">
-          <p:childTnLst>
-            <p:seq concurrent="1" nextAc="seek">
-              <p:cTn id="2" dur="indefinite" nodeType="mainSeq">
-                <p:childTnLst>
-                  <p:par>
-                    <p:cTn id="3" fill="hold">
-                      <p:stCondLst>
-                        <p:cond delay="indefinite"/>
-                      </p:stCondLst>
-                      <p:childTnLst>
-                        <p:par>
-                          <p:cTn id="4" fill="hold">
-                            <p:stCondLst>
-                              <p:cond delay="0"/>
-                            </p:stCondLst>
-                            <p:childTnLst>
-                              <p:par>
-                                <p:cTn id="5" presetID="1" presetClass="mediacall" presetSubtype="0" fill="hold" nodeType="clickEffect">
-                                  <p:stCondLst>
-                                    <p:cond delay="0"/>
-                                  </p:stCondLst>
-                                  <p:childTnLst>
-                                    <p:cmd type="call" cmd="playFrom(0.0)">
-                                      <p:cBhvr>
-                                        <p:cTn id="6" dur="10940" fill="hold"/>
-                                        <p:tgtEl>
-                                          <p:spTgt spid="4"/>
-                                        </p:tgtEl>
-                                      </p:cBhvr>
-                                    </p:cmd>
-                                  </p:childTnLst>
-                                </p:cTn>
-                              </p:par>
-                            </p:childTnLst>
-                          </p:cTn>
-                        </p:par>
-                      </p:childTnLst>
-                    </p:cTn>
-                  </p:par>
-                </p:childTnLst>
-              </p:cTn>
-              <p:prevCondLst>
-                <p:cond evt="onPrev" delay="0">
-                  <p:tgtEl>
-                    <p:sldTgt/>
-                  </p:tgtEl>
-                </p:cond>
-              </p:prevCondLst>
-              <p:nextCondLst>
-                <p:cond evt="onNext" delay="0">
-                  <p:tgtEl>
-                    <p:sldTgt/>
-                  </p:tgtEl>
-                </p:cond>
-              </p:nextCondLst>
-            </p:seq>
-            <p:audio>
-              <p:cMediaNode vol="80000">
-                <p:cTn id="7" fill="hold" display="0">
-                  <p:stCondLst>
-                    <p:cond delay="indefinite"/>
-                  </p:stCondLst>
-                  <p:endCondLst>
-                    <p:cond evt="onStopAudio" delay="0">
-                      <p:tgtEl>
-                        <p:sldTgt/>
-                      </p:tgtEl>
-                    </p:cond>
-                  </p:endCondLst>
-                </p:cTn>
-                <p:tgtEl>
-                  <p:spTgt spid="4"/>
-                </p:tgtEl>
-              </p:cMediaNode>
-            </p:audio>
-          </p:childTnLst>
-        </p:cTn>
-      </p:par>
-    </p:tnLst>
-  </p:timing>
-</p:sld>
-</file>
-
-<file path=ppt/slides/slide4.xml><?xml version="1.0" encoding="utf-8"?>
-<p:sld xmlns:a="http://schemas.openxmlformats.org/drawingml/2006/main" xmlns:r="http://schemas.openxmlformats.org/officeDocument/2006/relationships" xmlns:p="http://schemas.openxmlformats.org/presentationml/2006/main">
-  <p:cSld>
-    <p:spTree>
-      <p:nvGrpSpPr>
-        <p:cNvPr id="1" name=""/>
-        <p:cNvGrpSpPr/>
-        <p:nvPr/>
-      </p:nvGrpSpPr>
-      <p:grpSpPr>
-        <a:xfrm>
-          <a:off x="0" y="0"/>
-          <a:ext cx="0" cy="0"/>
-          <a:chOff x="0" y="0"/>
-          <a:chExt cx="0" cy="0"/>
-        </a:xfrm>
-      </p:grpSpPr>
-      <p:sp>
-        <p:nvSpPr>
-          <p:cNvPr id="2" name="Title 1">
-            <a:extLst>
-              <a:ext uri="{FF2B5EF4-FFF2-40B4-BE49-F238E27FC236}">
-                <a16:creationId xmlns:a16="http://schemas.microsoft.com/office/drawing/2014/main" id="{5E0D1876-A9F7-D11D-D7BC-A9EF2691934D}"/>
-              </a:ext>
-            </a:extLst>
-          </p:cNvPr>
-          <p:cNvSpPr>
-            <a:spLocks noGrp="1"/>
-          </p:cNvSpPr>
-          <p:nvPr>
-            <p:ph type="title"/>
-          </p:nvPr>
-        </p:nvSpPr>
-        <p:spPr>
-          <a:xfrm>
-            <a:off x="3350888" y="2409581"/>
-            <a:ext cx="5490224" cy="1689390"/>
-          </a:xfrm>
-        </p:spPr>
-        <p:txBody>
-          <a:bodyPr>
-            <a:normAutofit/>
-          </a:bodyPr>
-          <a:lstStyle/>
-          <a:p>
-            <a:r>
-              <a:rPr lang="en-CA" b="1"/>
-              <a:t>Evolution of U.S. AI Regulation</a:t>
-            </a:r>
-            <a:endParaRPr lang="en-US"/>
-          </a:p>
-        </p:txBody>
-      </p:sp>
-      <p:pic>
-        <p:nvPicPr>
-          <p:cNvPr id="4" name="Audio Recording Oct 21, 2026 at 4:54:21 AM">
-            <a:hlinkClick r:id="" action="ppaction://media"/>
-            <a:extLst>
-              <a:ext uri="{FF2B5EF4-FFF2-40B4-BE49-F238E27FC236}">
-                <a16:creationId xmlns:a16="http://schemas.microsoft.com/office/drawing/2014/main" id="{5C9C8320-EF5B-8A64-5266-821A7971BBBB}"/>
-              </a:ext>
-            </a:extLst>
-          </p:cNvPr>
-          <p:cNvPicPr>
-            <a:picLocks noChangeAspect="1"/>
-          </p:cNvPicPr>
-          <p:nvPr>
-            <a:audioFile r:link="rId2"/>
-            <p:extLst>
-              <p:ext uri="{DAA4B4D4-6D71-4841-9C94-3DE7FCFB9230}">
-                <p14:media xmlns:p14="http://schemas.microsoft.com/office/powerpoint/2010/main" r:embed="rId1"/>
-              </p:ext>
-            </p:extLst>
-          </p:nvPr>
-        </p:nvPicPr>
-        <p:blipFill>
-          <a:blip r:embed="rId4"/>
-          <a:stretch>
-            <a:fillRect/>
-          </a:stretch>
-        </p:blipFill>
-        <p:spPr>
-          <a:xfrm>
-            <a:off x="5689600" y="3022600"/>
-            <a:ext cx="812800" cy="812800"/>
-          </a:xfrm>
-          <a:prstGeom prst="rect">
-            <a:avLst/>
-          </a:prstGeom>
-        </p:spPr>
-      </p:pic>
-    </p:spTree>
-    <p:extLst>
-      <p:ext uri="{BB962C8B-B14F-4D97-AF65-F5344CB8AC3E}">
-        <p14:creationId xmlns:p14="http://schemas.microsoft.com/office/powerpoint/2010/main" val="1406958433"/>
+        <p14:creationId xmlns:p14="http://schemas.microsoft.com/office/powerpoint/2010/main" val="2714330667"/>
       </p:ext>
     </p:extLst>
   </p:cSld>
@@ -16645,7 +17310,7 @@
 </p:sld>
 </file>
 
-<file path=ppt/slides/slide5.xml><?xml version="1.0" encoding="utf-8"?>
+<file path=ppt/slides/slide13.xml><?xml version="1.0" encoding="utf-8"?>
 <p:sld xmlns:a="http://schemas.openxmlformats.org/drawingml/2006/main" xmlns:r="http://schemas.openxmlformats.org/officeDocument/2006/relationships" xmlns:p="http://schemas.openxmlformats.org/presentationml/2006/main">
   <p:cSld>
     <p:spTree>
@@ -17332,7 +17997,7 @@
     </p:spTree>
     <p:extLst>
       <p:ext uri="{BB962C8B-B14F-4D97-AF65-F5344CB8AC3E}">
-        <p14:creationId xmlns:p14="http://schemas.microsoft.com/office/powerpoint/2010/main" val="39423591"/>
+        <p14:creationId xmlns:p14="http://schemas.microsoft.com/office/powerpoint/2010/main" val="454156111"/>
       </p:ext>
     </p:extLst>
   </p:cSld>
@@ -17426,7 +18091,7 @@
 </p:sld>
 </file>
 
-<file path=ppt/slides/slide6.xml><?xml version="1.0" encoding="utf-8"?>
+<file path=ppt/slides/slide14.xml><?xml version="1.0" encoding="utf-8"?>
 <p:sld xmlns:a="http://schemas.openxmlformats.org/drawingml/2006/main" xmlns:r="http://schemas.openxmlformats.org/officeDocument/2006/relationships" xmlns:p="http://schemas.openxmlformats.org/presentationml/2006/main">
   <p:cSld>
     <p:spTree>
@@ -17651,7 +18316,7 @@
     </p:spTree>
     <p:extLst>
       <p:ext uri="{BB962C8B-B14F-4D97-AF65-F5344CB8AC3E}">
-        <p14:creationId xmlns:p14="http://schemas.microsoft.com/office/powerpoint/2010/main" val="2371300171"/>
+        <p14:creationId xmlns:p14="http://schemas.microsoft.com/office/powerpoint/2010/main" val="1688518221"/>
       </p:ext>
     </p:extLst>
   </p:cSld>
@@ -17745,7 +18410,1452 @@
 </p:sld>
 </file>
 
-<file path=ppt/slides/slide7.xml><?xml version="1.0" encoding="utf-8"?>
+<file path=ppt/slides/slide15.xml><?xml version="1.0" encoding="utf-8"?>
+<p:sld xmlns:a="http://schemas.openxmlformats.org/drawingml/2006/main" xmlns:r="http://schemas.openxmlformats.org/officeDocument/2006/relationships" xmlns:p="http://schemas.openxmlformats.org/presentationml/2006/main">
+  <p:cSld>
+    <p:spTree>
+      <p:nvGrpSpPr>
+        <p:cNvPr id="1" name="">
+          <a:extLst>
+            <a:ext uri="{FF2B5EF4-FFF2-40B4-BE49-F238E27FC236}">
+              <a16:creationId xmlns:a16="http://schemas.microsoft.com/office/drawing/2014/main" id="{4BDB274E-6853-B1F0-AA03-C29BE4F14367}"/>
+            </a:ext>
+          </a:extLst>
+        </p:cNvPr>
+        <p:cNvGrpSpPr/>
+        <p:nvPr/>
+      </p:nvGrpSpPr>
+      <p:grpSpPr>
+        <a:xfrm>
+          <a:off x="0" y="0"/>
+          <a:ext cx="0" cy="0"/>
+          <a:chOff x="0" y="0"/>
+          <a:chExt cx="0" cy="0"/>
+        </a:xfrm>
+      </p:grpSpPr>
+      <p:sp>
+        <p:nvSpPr>
+          <p:cNvPr id="2" name="Title 1">
+            <a:extLst>
+              <a:ext uri="{FF2B5EF4-FFF2-40B4-BE49-F238E27FC236}">
+                <a16:creationId xmlns:a16="http://schemas.microsoft.com/office/drawing/2014/main" id="{1CD1CE42-F2EF-4C9D-E760-ABAE782BCB52}"/>
+              </a:ext>
+            </a:extLst>
+          </p:cNvPr>
+          <p:cNvSpPr>
+            <a:spLocks noGrp="1"/>
+          </p:cNvSpPr>
+          <p:nvPr>
+            <p:ph type="title"/>
+          </p:nvPr>
+        </p:nvSpPr>
+        <p:spPr>
+          <a:xfrm>
+            <a:off x="3350888" y="2409581"/>
+            <a:ext cx="5490224" cy="1689390"/>
+          </a:xfrm>
+        </p:spPr>
+        <p:txBody>
+          <a:bodyPr>
+            <a:normAutofit/>
+          </a:bodyPr>
+          <a:lstStyle/>
+          <a:p>
+            <a:r>
+              <a:rPr lang="en-CA" b="1"/>
+              <a:t>AI Regulations in Other Countries</a:t>
+            </a:r>
+            <a:endParaRPr lang="en-CA"/>
+          </a:p>
+        </p:txBody>
+      </p:sp>
+    </p:spTree>
+    <p:extLst>
+      <p:ext uri="{BB962C8B-B14F-4D97-AF65-F5344CB8AC3E}">
+        <p14:creationId xmlns:p14="http://schemas.microsoft.com/office/powerpoint/2010/main" val="987311882"/>
+      </p:ext>
+    </p:extLst>
+  </p:cSld>
+  <p:clrMapOvr>
+    <a:masterClrMapping/>
+  </p:clrMapOvr>
+</p:sld>
+</file>
+
+<file path=ppt/slides/slide16.xml><?xml version="1.0" encoding="utf-8"?>
+<p:sld xmlns:a="http://schemas.openxmlformats.org/drawingml/2006/main" xmlns:r="http://schemas.openxmlformats.org/officeDocument/2006/relationships" xmlns:p="http://schemas.openxmlformats.org/presentationml/2006/main">
+  <p:cSld>
+    <p:spTree>
+      <p:nvGrpSpPr>
+        <p:cNvPr id="1" name=""/>
+        <p:cNvGrpSpPr/>
+        <p:nvPr/>
+      </p:nvGrpSpPr>
+      <p:grpSpPr>
+        <a:xfrm>
+          <a:off x="0" y="0"/>
+          <a:ext cx="0" cy="0"/>
+          <a:chOff x="0" y="0"/>
+          <a:chExt cx="0" cy="0"/>
+        </a:xfrm>
+      </p:grpSpPr>
+      <p:sp>
+        <p:nvSpPr>
+          <p:cNvPr id="2" name="Title 1">
+            <a:extLst>
+              <a:ext uri="{FF2B5EF4-FFF2-40B4-BE49-F238E27FC236}">
+                <a16:creationId xmlns:a16="http://schemas.microsoft.com/office/drawing/2014/main" id="{09153823-CB98-8271-F585-18324734119A}"/>
+              </a:ext>
+            </a:extLst>
+          </p:cNvPr>
+          <p:cNvSpPr>
+            <a:spLocks noGrp="1"/>
+          </p:cNvSpPr>
+          <p:nvPr>
+            <p:ph type="title"/>
+          </p:nvPr>
+        </p:nvSpPr>
+        <p:spPr/>
+        <p:txBody>
+          <a:bodyPr/>
+          <a:lstStyle/>
+          <a:p>
+            <a:r>
+              <a:rPr lang="en-CA" b="1"/>
+              <a:t>The AI Regulation Debate</a:t>
+            </a:r>
+            <a:endParaRPr lang="en-US"/>
+          </a:p>
+        </p:txBody>
+      </p:sp>
+      <p:sp>
+        <p:nvSpPr>
+          <p:cNvPr id="3" name="Text Placeholder 2">
+            <a:extLst>
+              <a:ext uri="{FF2B5EF4-FFF2-40B4-BE49-F238E27FC236}">
+                <a16:creationId xmlns:a16="http://schemas.microsoft.com/office/drawing/2014/main" id="{1E8FBB31-67A5-B3A5-012E-462B38A1BB0D}"/>
+              </a:ext>
+            </a:extLst>
+          </p:cNvPr>
+          <p:cNvSpPr>
+            <a:spLocks noGrp="1"/>
+          </p:cNvSpPr>
+          <p:nvPr>
+            <p:ph type="body" idx="1"/>
+          </p:nvPr>
+        </p:nvSpPr>
+        <p:spPr>
+          <a:xfrm>
+            <a:off x="5125137" y="1607437"/>
+            <a:ext cx="6265088" cy="685800"/>
+          </a:xfrm>
+        </p:spPr>
+        <p:txBody>
+          <a:bodyPr/>
+          <a:lstStyle/>
+          <a:p>
+            <a:r>
+              <a:rPr lang="en-CA" b="1"/>
+              <a:t>EUROPEAN Union 🇪🇺</a:t>
+            </a:r>
+            <a:endParaRPr lang="en-CA"/>
+          </a:p>
+        </p:txBody>
+      </p:sp>
+      <p:sp>
+        <p:nvSpPr>
+          <p:cNvPr id="4" name="Content Placeholder 3">
+            <a:extLst>
+              <a:ext uri="{FF2B5EF4-FFF2-40B4-BE49-F238E27FC236}">
+                <a16:creationId xmlns:a16="http://schemas.microsoft.com/office/drawing/2014/main" id="{5E8A00CA-5374-C00C-8FA2-F521FF93D2DD}"/>
+              </a:ext>
+            </a:extLst>
+          </p:cNvPr>
+          <p:cNvSpPr>
+            <a:spLocks noGrp="1"/>
+          </p:cNvSpPr>
+          <p:nvPr>
+            <p:ph sz="half" idx="2"/>
+          </p:nvPr>
+        </p:nvSpPr>
+        <p:spPr>
+          <a:xfrm>
+            <a:off x="5125305" y="2293238"/>
+            <a:ext cx="6264350" cy="685800"/>
+          </a:xfrm>
+        </p:spPr>
+        <p:txBody>
+          <a:bodyPr/>
+          <a:lstStyle/>
+          <a:p>
+            <a:r>
+              <a:rPr lang="en-CA"/>
+              <a:t>Risk-based rules and AI safety.</a:t>
+            </a:r>
+          </a:p>
+        </p:txBody>
+      </p:sp>
+      <p:sp>
+        <p:nvSpPr>
+          <p:cNvPr id="5" name="Text Placeholder 4">
+            <a:extLst>
+              <a:ext uri="{FF2B5EF4-FFF2-40B4-BE49-F238E27FC236}">
+                <a16:creationId xmlns:a16="http://schemas.microsoft.com/office/drawing/2014/main" id="{C9744589-DE8D-01BD-78AA-F3DA184B3A01}"/>
+              </a:ext>
+            </a:extLst>
+          </p:cNvPr>
+          <p:cNvSpPr>
+            <a:spLocks noGrp="1"/>
+          </p:cNvSpPr>
+          <p:nvPr>
+            <p:ph type="body" sz="quarter" idx="3"/>
+          </p:nvPr>
+        </p:nvSpPr>
+        <p:spPr>
+          <a:xfrm>
+            <a:off x="5118653" y="2836640"/>
+            <a:ext cx="6264414" cy="685800"/>
+          </a:xfrm>
+        </p:spPr>
+        <p:txBody>
+          <a:bodyPr/>
+          <a:lstStyle/>
+          <a:p>
+            <a:r>
+              <a:rPr lang="en-CA" b="1"/>
+              <a:t>United states 🇺🇸</a:t>
+            </a:r>
+            <a:endParaRPr lang="en-CA"/>
+          </a:p>
+        </p:txBody>
+      </p:sp>
+      <p:sp>
+        <p:nvSpPr>
+          <p:cNvPr id="6" name="Content Placeholder 5">
+            <a:extLst>
+              <a:ext uri="{FF2B5EF4-FFF2-40B4-BE49-F238E27FC236}">
+                <a16:creationId xmlns:a16="http://schemas.microsoft.com/office/drawing/2014/main" id="{47E9770E-7ACA-D02E-5474-62A7FD249115}"/>
+              </a:ext>
+            </a:extLst>
+          </p:cNvPr>
+          <p:cNvSpPr>
+            <a:spLocks noGrp="1"/>
+          </p:cNvSpPr>
+          <p:nvPr>
+            <p:ph sz="quarter" idx="4"/>
+          </p:nvPr>
+        </p:nvSpPr>
+        <p:spPr>
+          <a:xfrm>
+            <a:off x="5118447" y="3522440"/>
+            <a:ext cx="6265588" cy="685800"/>
+          </a:xfrm>
+        </p:spPr>
+        <p:txBody>
+          <a:bodyPr/>
+          <a:lstStyle/>
+          <a:p>
+            <a:r>
+              <a:rPr lang="en-CA"/>
+              <a:t>Innovation and competitiveness.</a:t>
+            </a:r>
+          </a:p>
+        </p:txBody>
+      </p:sp>
+      <p:sp>
+        <p:nvSpPr>
+          <p:cNvPr id="8" name="Text Placeholder 4">
+            <a:extLst>
+              <a:ext uri="{FF2B5EF4-FFF2-40B4-BE49-F238E27FC236}">
+                <a16:creationId xmlns:a16="http://schemas.microsoft.com/office/drawing/2014/main" id="{E1A49808-B143-1705-B441-03140BB995C0}"/>
+              </a:ext>
+            </a:extLst>
+          </p:cNvPr>
+          <p:cNvSpPr txBox="1">
+            <a:spLocks/>
+          </p:cNvSpPr>
+          <p:nvPr/>
+        </p:nvSpPr>
+        <p:spPr>
+          <a:xfrm>
+            <a:off x="5118653" y="4138612"/>
+            <a:ext cx="6264414" cy="685800"/>
+          </a:xfrm>
+          <a:prstGeom prst="rect">
+            <a:avLst/>
+          </a:prstGeom>
+        </p:spPr>
+        <p:txBody>
+          <a:bodyPr vert="horz" lIns="91440" tIns="45720" rIns="91440" bIns="45720" rtlCol="0" anchor="ctr">
+            <a:noAutofit/>
+          </a:bodyPr>
+          <a:lstStyle>
+            <a:lvl1pPr marL="0" indent="0" algn="l" defTabSz="914400" rtl="0" eaLnBrk="1" latinLnBrk="0" hangingPunct="1">
+              <a:lnSpc>
+                <a:spcPct val="100000"/>
+              </a:lnSpc>
+              <a:spcBef>
+                <a:spcPts val="1000"/>
+              </a:spcBef>
+              <a:buClr>
+                <a:schemeClr val="accent1"/>
+              </a:buClr>
+              <a:buSzPct val="110000"/>
+              <a:buFont typeface="Wingdings" panose="05000000000000000000" pitchFamily="2" charset="2"/>
+              <a:buNone/>
+              <a:defRPr sz="2200" b="0" kern="1200" cap="all" baseline="0">
+                <a:solidFill>
+                  <a:schemeClr val="accent1"/>
+                </a:solidFill>
+                <a:effectLst/>
+                <a:latin typeface="+mn-lt"/>
+                <a:ea typeface="+mn-ea"/>
+                <a:cs typeface="+mn-cs"/>
+              </a:defRPr>
+            </a:lvl1pPr>
+            <a:lvl2pPr marL="457200" indent="0" algn="l" defTabSz="914400" rtl="0" eaLnBrk="1" latinLnBrk="0" hangingPunct="1">
+              <a:lnSpc>
+                <a:spcPct val="120000"/>
+              </a:lnSpc>
+              <a:spcBef>
+                <a:spcPts val="500"/>
+              </a:spcBef>
+              <a:buClr>
+                <a:schemeClr val="accent1"/>
+              </a:buClr>
+              <a:buSzPct val="110000"/>
+              <a:buFont typeface="Wingdings" panose="05000000000000000000" pitchFamily="2" charset="2"/>
+              <a:buNone/>
+              <a:defRPr sz="2000" b="1" kern="1200">
+                <a:solidFill>
+                  <a:schemeClr val="tx1"/>
+                </a:solidFill>
+                <a:effectLst/>
+                <a:latin typeface="+mn-lt"/>
+                <a:ea typeface="+mn-ea"/>
+                <a:cs typeface="+mn-cs"/>
+              </a:defRPr>
+            </a:lvl2pPr>
+            <a:lvl3pPr marL="914400" indent="0" algn="l" defTabSz="914400" rtl="0" eaLnBrk="1" latinLnBrk="0" hangingPunct="1">
+              <a:lnSpc>
+                <a:spcPct val="120000"/>
+              </a:lnSpc>
+              <a:spcBef>
+                <a:spcPts val="500"/>
+              </a:spcBef>
+              <a:buClr>
+                <a:schemeClr val="accent1"/>
+              </a:buClr>
+              <a:buSzPct val="110000"/>
+              <a:buFont typeface="Wingdings" panose="05000000000000000000" pitchFamily="2" charset="2"/>
+              <a:buNone/>
+              <a:defRPr sz="1800" b="1" kern="1200">
+                <a:solidFill>
+                  <a:schemeClr val="tx1"/>
+                </a:solidFill>
+                <a:effectLst/>
+                <a:latin typeface="+mn-lt"/>
+                <a:ea typeface="+mn-ea"/>
+                <a:cs typeface="+mn-cs"/>
+              </a:defRPr>
+            </a:lvl3pPr>
+            <a:lvl4pPr marL="1371600" indent="0" algn="l" defTabSz="914400" rtl="0" eaLnBrk="1" latinLnBrk="0" hangingPunct="1">
+              <a:lnSpc>
+                <a:spcPct val="120000"/>
+              </a:lnSpc>
+              <a:spcBef>
+                <a:spcPts val="500"/>
+              </a:spcBef>
+              <a:buClr>
+                <a:schemeClr val="accent1"/>
+              </a:buClr>
+              <a:buSzPct val="110000"/>
+              <a:buFont typeface="Wingdings" panose="05000000000000000000" pitchFamily="2" charset="2"/>
+              <a:buNone/>
+              <a:defRPr sz="1600" b="1" kern="1200">
+                <a:solidFill>
+                  <a:schemeClr val="tx1"/>
+                </a:solidFill>
+                <a:effectLst/>
+                <a:latin typeface="+mn-lt"/>
+                <a:ea typeface="+mn-ea"/>
+                <a:cs typeface="+mn-cs"/>
+              </a:defRPr>
+            </a:lvl4pPr>
+            <a:lvl5pPr marL="1828800" indent="0" algn="l" defTabSz="914400" rtl="0" eaLnBrk="1" latinLnBrk="0" hangingPunct="1">
+              <a:lnSpc>
+                <a:spcPct val="120000"/>
+              </a:lnSpc>
+              <a:spcBef>
+                <a:spcPts val="500"/>
+              </a:spcBef>
+              <a:buClr>
+                <a:schemeClr val="accent1"/>
+              </a:buClr>
+              <a:buSzPct val="110000"/>
+              <a:buFont typeface="Wingdings" panose="05000000000000000000" pitchFamily="2" charset="2"/>
+              <a:buNone/>
+              <a:defRPr sz="1600" b="1" kern="1200">
+                <a:solidFill>
+                  <a:schemeClr val="tx1"/>
+                </a:solidFill>
+                <a:effectLst/>
+                <a:latin typeface="+mn-lt"/>
+                <a:ea typeface="+mn-ea"/>
+                <a:cs typeface="+mn-cs"/>
+              </a:defRPr>
+            </a:lvl5pPr>
+            <a:lvl6pPr marL="2286000" indent="0" algn="l" defTabSz="914400" rtl="0" eaLnBrk="1" latinLnBrk="0" hangingPunct="1">
+              <a:lnSpc>
+                <a:spcPct val="120000"/>
+              </a:lnSpc>
+              <a:spcBef>
+                <a:spcPts val="500"/>
+              </a:spcBef>
+              <a:buClr>
+                <a:schemeClr val="accent1"/>
+              </a:buClr>
+              <a:buSzPct val="110000"/>
+              <a:buFont typeface="Wingdings" panose="05000000000000000000" pitchFamily="2" charset="2"/>
+              <a:buNone/>
+              <a:defRPr sz="1600" b="1" kern="1200">
+                <a:solidFill>
+                  <a:schemeClr val="tx1"/>
+                </a:solidFill>
+                <a:effectLst/>
+                <a:latin typeface="+mn-lt"/>
+                <a:ea typeface="+mn-ea"/>
+                <a:cs typeface="+mn-cs"/>
+              </a:defRPr>
+            </a:lvl6pPr>
+            <a:lvl7pPr marL="2743200" indent="0" algn="l" defTabSz="914400" rtl="0" eaLnBrk="1" latinLnBrk="0" hangingPunct="1">
+              <a:lnSpc>
+                <a:spcPct val="120000"/>
+              </a:lnSpc>
+              <a:spcBef>
+                <a:spcPts val="500"/>
+              </a:spcBef>
+              <a:buClr>
+                <a:schemeClr val="accent1"/>
+              </a:buClr>
+              <a:buSzPct val="110000"/>
+              <a:buFont typeface="Wingdings" panose="05000000000000000000" pitchFamily="2" charset="2"/>
+              <a:buNone/>
+              <a:defRPr sz="1600" b="1" kern="1200">
+                <a:solidFill>
+                  <a:schemeClr val="tx1"/>
+                </a:solidFill>
+                <a:effectLst/>
+                <a:latin typeface="+mn-lt"/>
+                <a:ea typeface="+mn-ea"/>
+                <a:cs typeface="+mn-cs"/>
+              </a:defRPr>
+            </a:lvl7pPr>
+            <a:lvl8pPr marL="3200400" indent="0" algn="l" defTabSz="914400" rtl="0" eaLnBrk="1" latinLnBrk="0" hangingPunct="1">
+              <a:lnSpc>
+                <a:spcPct val="120000"/>
+              </a:lnSpc>
+              <a:spcBef>
+                <a:spcPts val="500"/>
+              </a:spcBef>
+              <a:buClr>
+                <a:schemeClr val="accent1"/>
+              </a:buClr>
+              <a:buSzPct val="110000"/>
+              <a:buFont typeface="Wingdings" panose="05000000000000000000" pitchFamily="2" charset="2"/>
+              <a:buNone/>
+              <a:defRPr sz="1600" b="1" kern="1200">
+                <a:solidFill>
+                  <a:schemeClr val="tx1"/>
+                </a:solidFill>
+                <a:effectLst/>
+                <a:latin typeface="+mn-lt"/>
+                <a:ea typeface="+mn-ea"/>
+                <a:cs typeface="+mn-cs"/>
+              </a:defRPr>
+            </a:lvl8pPr>
+            <a:lvl9pPr marL="3657600" indent="0" algn="l" defTabSz="914400" rtl="0" eaLnBrk="1" latinLnBrk="0" hangingPunct="1">
+              <a:lnSpc>
+                <a:spcPct val="120000"/>
+              </a:lnSpc>
+              <a:spcBef>
+                <a:spcPts val="500"/>
+              </a:spcBef>
+              <a:buClr>
+                <a:schemeClr val="accent1"/>
+              </a:buClr>
+              <a:buSzPct val="110000"/>
+              <a:buFont typeface="Wingdings" panose="05000000000000000000" pitchFamily="2" charset="2"/>
+              <a:buNone/>
+              <a:defRPr sz="1600" b="1" kern="1200">
+                <a:solidFill>
+                  <a:schemeClr val="tx1"/>
+                </a:solidFill>
+                <a:effectLst/>
+                <a:latin typeface="+mn-lt"/>
+                <a:ea typeface="+mn-ea"/>
+                <a:cs typeface="+mn-cs"/>
+              </a:defRPr>
+            </a:lvl9pPr>
+          </a:lstStyle>
+          <a:p>
+            <a:r>
+              <a:rPr lang="en-CA" b="1"/>
+              <a:t>China 🇨🇳</a:t>
+            </a:r>
+          </a:p>
+        </p:txBody>
+      </p:sp>
+      <p:sp>
+        <p:nvSpPr>
+          <p:cNvPr id="9" name="Content Placeholder 5">
+            <a:extLst>
+              <a:ext uri="{FF2B5EF4-FFF2-40B4-BE49-F238E27FC236}">
+                <a16:creationId xmlns:a16="http://schemas.microsoft.com/office/drawing/2014/main" id="{BB065A42-0575-74AD-517C-5FBE568A2386}"/>
+              </a:ext>
+            </a:extLst>
+          </p:cNvPr>
+          <p:cNvSpPr txBox="1">
+            <a:spLocks/>
+          </p:cNvSpPr>
+          <p:nvPr/>
+        </p:nvSpPr>
+        <p:spPr>
+          <a:xfrm>
+            <a:off x="5118447" y="4824412"/>
+            <a:ext cx="6265588" cy="685800"/>
+          </a:xfrm>
+          <a:prstGeom prst="rect">
+            <a:avLst/>
+          </a:prstGeom>
+        </p:spPr>
+        <p:txBody>
+          <a:bodyPr vert="horz" lIns="91440" tIns="45720" rIns="91440" bIns="45720" rtlCol="0">
+            <a:normAutofit/>
+          </a:bodyPr>
+          <a:lstStyle>
+            <a:lvl1pPr marL="228600" indent="-228600" algn="l" defTabSz="914400" rtl="0" eaLnBrk="1" latinLnBrk="0" hangingPunct="1">
+              <a:lnSpc>
+                <a:spcPct val="120000"/>
+              </a:lnSpc>
+              <a:spcBef>
+                <a:spcPts val="1000"/>
+              </a:spcBef>
+              <a:buClr>
+                <a:schemeClr val="accent1"/>
+              </a:buClr>
+              <a:buSzPct val="110000"/>
+              <a:buFont typeface="Wingdings" panose="05000000000000000000" pitchFamily="2" charset="2"/>
+              <a:buChar char="§"/>
+              <a:defRPr sz="1800" kern="1200">
+                <a:solidFill>
+                  <a:schemeClr val="tx1"/>
+                </a:solidFill>
+                <a:effectLst/>
+                <a:latin typeface="+mn-lt"/>
+                <a:ea typeface="+mn-ea"/>
+                <a:cs typeface="+mn-cs"/>
+              </a:defRPr>
+            </a:lvl1pPr>
+            <a:lvl2pPr marL="685800" indent="-228600" algn="l" defTabSz="914400" rtl="0" eaLnBrk="1" latinLnBrk="0" hangingPunct="1">
+              <a:lnSpc>
+                <a:spcPct val="120000"/>
+              </a:lnSpc>
+              <a:spcBef>
+                <a:spcPts val="500"/>
+              </a:spcBef>
+              <a:buClr>
+                <a:schemeClr val="accent1"/>
+              </a:buClr>
+              <a:buSzPct val="110000"/>
+              <a:buFont typeface="Wingdings" panose="05000000000000000000" pitchFamily="2" charset="2"/>
+              <a:buChar char="§"/>
+              <a:defRPr sz="1600" kern="1200">
+                <a:solidFill>
+                  <a:schemeClr val="tx1"/>
+                </a:solidFill>
+                <a:effectLst/>
+                <a:latin typeface="+mn-lt"/>
+                <a:ea typeface="+mn-ea"/>
+                <a:cs typeface="+mn-cs"/>
+              </a:defRPr>
+            </a:lvl2pPr>
+            <a:lvl3pPr marL="1143000" indent="-228600" algn="l" defTabSz="914400" rtl="0" eaLnBrk="1" latinLnBrk="0" hangingPunct="1">
+              <a:lnSpc>
+                <a:spcPct val="120000"/>
+              </a:lnSpc>
+              <a:spcBef>
+                <a:spcPts val="500"/>
+              </a:spcBef>
+              <a:buClr>
+                <a:schemeClr val="accent1"/>
+              </a:buClr>
+              <a:buSzPct val="110000"/>
+              <a:buFont typeface="Wingdings" panose="05000000000000000000" pitchFamily="2" charset="2"/>
+              <a:buChar char="§"/>
+              <a:defRPr sz="1400" kern="1200">
+                <a:solidFill>
+                  <a:schemeClr val="tx1"/>
+                </a:solidFill>
+                <a:effectLst/>
+                <a:latin typeface="+mn-lt"/>
+                <a:ea typeface="+mn-ea"/>
+                <a:cs typeface="+mn-cs"/>
+              </a:defRPr>
+            </a:lvl3pPr>
+            <a:lvl4pPr marL="1600200" indent="-228600" algn="l" defTabSz="914400" rtl="0" eaLnBrk="1" latinLnBrk="0" hangingPunct="1">
+              <a:lnSpc>
+                <a:spcPct val="120000"/>
+              </a:lnSpc>
+              <a:spcBef>
+                <a:spcPts val="500"/>
+              </a:spcBef>
+              <a:buClr>
+                <a:schemeClr val="accent1"/>
+              </a:buClr>
+              <a:buSzPct val="110000"/>
+              <a:buFont typeface="Wingdings" panose="05000000000000000000" pitchFamily="2" charset="2"/>
+              <a:buChar char="§"/>
+              <a:defRPr sz="1200" kern="1200">
+                <a:solidFill>
+                  <a:schemeClr val="tx1"/>
+                </a:solidFill>
+                <a:effectLst/>
+                <a:latin typeface="+mn-lt"/>
+                <a:ea typeface="+mn-ea"/>
+                <a:cs typeface="+mn-cs"/>
+              </a:defRPr>
+            </a:lvl4pPr>
+            <a:lvl5pPr marL="2057400" indent="-228600" algn="l" defTabSz="914400" rtl="0" eaLnBrk="1" latinLnBrk="0" hangingPunct="1">
+              <a:lnSpc>
+                <a:spcPct val="120000"/>
+              </a:lnSpc>
+              <a:spcBef>
+                <a:spcPts val="500"/>
+              </a:spcBef>
+              <a:buClr>
+                <a:schemeClr val="accent1"/>
+              </a:buClr>
+              <a:buSzPct val="110000"/>
+              <a:buFont typeface="Wingdings" panose="05000000000000000000" pitchFamily="2" charset="2"/>
+              <a:buChar char="§"/>
+              <a:defRPr sz="1200" kern="1200">
+                <a:solidFill>
+                  <a:schemeClr val="tx1"/>
+                </a:solidFill>
+                <a:effectLst/>
+                <a:latin typeface="+mn-lt"/>
+                <a:ea typeface="+mn-ea"/>
+                <a:cs typeface="+mn-cs"/>
+              </a:defRPr>
+            </a:lvl5pPr>
+            <a:lvl6pPr marL="2514600" indent="-228600" algn="l" defTabSz="914400" rtl="0" eaLnBrk="1" latinLnBrk="0" hangingPunct="1">
+              <a:lnSpc>
+                <a:spcPct val="120000"/>
+              </a:lnSpc>
+              <a:spcBef>
+                <a:spcPts val="500"/>
+              </a:spcBef>
+              <a:buClr>
+                <a:schemeClr val="accent1"/>
+              </a:buClr>
+              <a:buSzPct val="110000"/>
+              <a:buFont typeface="Wingdings" panose="05000000000000000000" pitchFamily="2" charset="2"/>
+              <a:buChar char="§"/>
+              <a:defRPr sz="1200" kern="1200">
+                <a:solidFill>
+                  <a:schemeClr val="tx1"/>
+                </a:solidFill>
+                <a:effectLst/>
+                <a:latin typeface="+mn-lt"/>
+                <a:ea typeface="+mn-ea"/>
+                <a:cs typeface="+mn-cs"/>
+              </a:defRPr>
+            </a:lvl6pPr>
+            <a:lvl7pPr marL="2971800" indent="-228600" algn="l" defTabSz="914400" rtl="0" eaLnBrk="1" latinLnBrk="0" hangingPunct="1">
+              <a:lnSpc>
+                <a:spcPct val="120000"/>
+              </a:lnSpc>
+              <a:spcBef>
+                <a:spcPts val="500"/>
+              </a:spcBef>
+              <a:buClr>
+                <a:schemeClr val="accent1"/>
+              </a:buClr>
+              <a:buSzPct val="110000"/>
+              <a:buFont typeface="Wingdings" panose="05000000000000000000" pitchFamily="2" charset="2"/>
+              <a:buChar char="§"/>
+              <a:defRPr sz="1200" kern="1200">
+                <a:solidFill>
+                  <a:schemeClr val="tx1"/>
+                </a:solidFill>
+                <a:effectLst/>
+                <a:latin typeface="+mn-lt"/>
+                <a:ea typeface="+mn-ea"/>
+                <a:cs typeface="+mn-cs"/>
+              </a:defRPr>
+            </a:lvl7pPr>
+            <a:lvl8pPr marL="3429000" indent="-228600" algn="l" defTabSz="914400" rtl="0" eaLnBrk="1" latinLnBrk="0" hangingPunct="1">
+              <a:lnSpc>
+                <a:spcPct val="120000"/>
+              </a:lnSpc>
+              <a:spcBef>
+                <a:spcPts val="500"/>
+              </a:spcBef>
+              <a:buClr>
+                <a:schemeClr val="accent1"/>
+              </a:buClr>
+              <a:buSzPct val="110000"/>
+              <a:buFont typeface="Wingdings" panose="05000000000000000000" pitchFamily="2" charset="2"/>
+              <a:buChar char="§"/>
+              <a:defRPr sz="1200" kern="1200">
+                <a:solidFill>
+                  <a:schemeClr val="tx1"/>
+                </a:solidFill>
+                <a:effectLst/>
+                <a:latin typeface="+mn-lt"/>
+                <a:ea typeface="+mn-ea"/>
+                <a:cs typeface="+mn-cs"/>
+              </a:defRPr>
+            </a:lvl8pPr>
+            <a:lvl9pPr marL="3886200" indent="-228600" algn="l" defTabSz="914400" rtl="0" eaLnBrk="1" latinLnBrk="0" hangingPunct="1">
+              <a:lnSpc>
+                <a:spcPct val="120000"/>
+              </a:lnSpc>
+              <a:spcBef>
+                <a:spcPts val="500"/>
+              </a:spcBef>
+              <a:buClr>
+                <a:schemeClr val="accent1"/>
+              </a:buClr>
+              <a:buSzPct val="110000"/>
+              <a:buFont typeface="Wingdings" panose="05000000000000000000" pitchFamily="2" charset="2"/>
+              <a:buChar char="§"/>
+              <a:defRPr sz="1200" kern="1200">
+                <a:solidFill>
+                  <a:schemeClr val="tx1"/>
+                </a:solidFill>
+                <a:effectLst/>
+                <a:latin typeface="+mn-lt"/>
+                <a:ea typeface="+mn-ea"/>
+                <a:cs typeface="+mn-cs"/>
+              </a:defRPr>
+            </a:lvl9pPr>
+          </a:lstStyle>
+          <a:p>
+            <a:r>
+              <a:rPr lang="en-CA"/>
+              <a:t>Government oversight and security.</a:t>
+            </a:r>
+          </a:p>
+        </p:txBody>
+      </p:sp>
+    </p:spTree>
+    <p:extLst>
+      <p:ext uri="{BB962C8B-B14F-4D97-AF65-F5344CB8AC3E}">
+        <p14:creationId xmlns:p14="http://schemas.microsoft.com/office/powerpoint/2010/main" val="3032918853"/>
+      </p:ext>
+    </p:extLst>
+  </p:cSld>
+  <p:clrMapOvr>
+    <a:masterClrMapping/>
+  </p:clrMapOvr>
+</p:sld>
+</file>
+
+<file path=ppt/slides/slide17.xml><?xml version="1.0" encoding="utf-8"?>
+<p:sld xmlns:a="http://schemas.openxmlformats.org/drawingml/2006/main" xmlns:r="http://schemas.openxmlformats.org/officeDocument/2006/relationships" xmlns:p="http://schemas.openxmlformats.org/presentationml/2006/main">
+  <p:cSld>
+    <p:spTree>
+      <p:nvGrpSpPr>
+        <p:cNvPr id="1" name="">
+          <a:extLst>
+            <a:ext uri="{FF2B5EF4-FFF2-40B4-BE49-F238E27FC236}">
+              <a16:creationId xmlns:a16="http://schemas.microsoft.com/office/drawing/2014/main" id="{093B8634-0847-A77D-DE45-B5B0D29AD7BE}"/>
+            </a:ext>
+          </a:extLst>
+        </p:cNvPr>
+        <p:cNvGrpSpPr/>
+        <p:nvPr/>
+      </p:nvGrpSpPr>
+      <p:grpSpPr>
+        <a:xfrm>
+          <a:off x="0" y="0"/>
+          <a:ext cx="0" cy="0"/>
+          <a:chOff x="0" y="0"/>
+          <a:chExt cx="0" cy="0"/>
+        </a:xfrm>
+      </p:grpSpPr>
+      <p:sp>
+        <p:nvSpPr>
+          <p:cNvPr id="2" name="Title 1">
+            <a:extLst>
+              <a:ext uri="{FF2B5EF4-FFF2-40B4-BE49-F238E27FC236}">
+                <a16:creationId xmlns:a16="http://schemas.microsoft.com/office/drawing/2014/main" id="{E088E774-E23F-A584-EB5E-2C9AD6642DEE}"/>
+              </a:ext>
+            </a:extLst>
+          </p:cNvPr>
+          <p:cNvSpPr>
+            <a:spLocks noGrp="1"/>
+          </p:cNvSpPr>
+          <p:nvPr>
+            <p:ph type="title"/>
+          </p:nvPr>
+        </p:nvSpPr>
+        <p:spPr/>
+        <p:txBody>
+          <a:bodyPr/>
+          <a:lstStyle/>
+          <a:p>
+            <a:r>
+              <a:rPr lang="en-CA" b="1"/>
+              <a:t>Other Global Approches</a:t>
+            </a:r>
+            <a:endParaRPr lang="en-US"/>
+          </a:p>
+        </p:txBody>
+      </p:sp>
+      <p:sp>
+        <p:nvSpPr>
+          <p:cNvPr id="3" name="Text Placeholder 2">
+            <a:extLst>
+              <a:ext uri="{FF2B5EF4-FFF2-40B4-BE49-F238E27FC236}">
+                <a16:creationId xmlns:a16="http://schemas.microsoft.com/office/drawing/2014/main" id="{3B0F067E-3206-AAFE-1AB3-A210FB156CB4}"/>
+              </a:ext>
+            </a:extLst>
+          </p:cNvPr>
+          <p:cNvSpPr>
+            <a:spLocks noGrp="1"/>
+          </p:cNvSpPr>
+          <p:nvPr>
+            <p:ph type="body" idx="1"/>
+          </p:nvPr>
+        </p:nvSpPr>
+        <p:spPr>
+          <a:xfrm>
+            <a:off x="5125137" y="1607437"/>
+            <a:ext cx="6265088" cy="685800"/>
+          </a:xfrm>
+        </p:spPr>
+        <p:txBody>
+          <a:bodyPr/>
+          <a:lstStyle/>
+          <a:p>
+            <a:r>
+              <a:rPr lang="en-CA" b="1"/>
+              <a:t>United Kingdom &amp; Japan</a:t>
+            </a:r>
+            <a:endParaRPr lang="en-CA"/>
+          </a:p>
+        </p:txBody>
+      </p:sp>
+      <p:sp>
+        <p:nvSpPr>
+          <p:cNvPr id="4" name="Content Placeholder 3">
+            <a:extLst>
+              <a:ext uri="{FF2B5EF4-FFF2-40B4-BE49-F238E27FC236}">
+                <a16:creationId xmlns:a16="http://schemas.microsoft.com/office/drawing/2014/main" id="{C496C166-7A96-7EFE-ADA3-85D0F50377E4}"/>
+              </a:ext>
+            </a:extLst>
+          </p:cNvPr>
+          <p:cNvSpPr>
+            <a:spLocks noGrp="1"/>
+          </p:cNvSpPr>
+          <p:nvPr>
+            <p:ph sz="half" idx="2"/>
+          </p:nvPr>
+        </p:nvSpPr>
+        <p:spPr>
+          <a:xfrm>
+            <a:off x="5125305" y="2293238"/>
+            <a:ext cx="6264350" cy="685800"/>
+          </a:xfrm>
+        </p:spPr>
+        <p:txBody>
+          <a:bodyPr>
+            <a:normAutofit/>
+          </a:bodyPr>
+          <a:lstStyle/>
+          <a:p>
+            <a:r>
+              <a:rPr lang="en-CA"/>
+              <a:t>Flexible, innovation-friendly guidelines.</a:t>
+            </a:r>
+          </a:p>
+        </p:txBody>
+      </p:sp>
+      <p:sp>
+        <p:nvSpPr>
+          <p:cNvPr id="5" name="Text Placeholder 4">
+            <a:extLst>
+              <a:ext uri="{FF2B5EF4-FFF2-40B4-BE49-F238E27FC236}">
+                <a16:creationId xmlns:a16="http://schemas.microsoft.com/office/drawing/2014/main" id="{2DA0A4AF-03A8-0BF9-82C2-99862D55F0C6}"/>
+              </a:ext>
+            </a:extLst>
+          </p:cNvPr>
+          <p:cNvSpPr>
+            <a:spLocks noGrp="1"/>
+          </p:cNvSpPr>
+          <p:nvPr>
+            <p:ph type="body" sz="quarter" idx="3"/>
+          </p:nvPr>
+        </p:nvSpPr>
+        <p:spPr>
+          <a:xfrm>
+            <a:off x="5118653" y="2836640"/>
+            <a:ext cx="6264414" cy="685800"/>
+          </a:xfrm>
+        </p:spPr>
+        <p:txBody>
+          <a:bodyPr/>
+          <a:lstStyle/>
+          <a:p>
+            <a:r>
+              <a:rPr lang="en-CA" b="1"/>
+              <a:t>Canada, India &amp; Brazil</a:t>
+            </a:r>
+            <a:endParaRPr lang="en-CA"/>
+          </a:p>
+        </p:txBody>
+      </p:sp>
+      <p:sp>
+        <p:nvSpPr>
+          <p:cNvPr id="6" name="Content Placeholder 5">
+            <a:extLst>
+              <a:ext uri="{FF2B5EF4-FFF2-40B4-BE49-F238E27FC236}">
+                <a16:creationId xmlns:a16="http://schemas.microsoft.com/office/drawing/2014/main" id="{BB2C26D4-721A-2FD7-A75D-1E9A999FD9E7}"/>
+              </a:ext>
+            </a:extLst>
+          </p:cNvPr>
+          <p:cNvSpPr>
+            <a:spLocks noGrp="1"/>
+          </p:cNvSpPr>
+          <p:nvPr>
+            <p:ph sz="quarter" idx="4"/>
+          </p:nvPr>
+        </p:nvSpPr>
+        <p:spPr>
+          <a:xfrm>
+            <a:off x="5118447" y="3522440"/>
+            <a:ext cx="6265588" cy="685800"/>
+          </a:xfrm>
+        </p:spPr>
+        <p:txBody>
+          <a:bodyPr>
+            <a:normAutofit/>
+          </a:bodyPr>
+          <a:lstStyle/>
+          <a:p>
+            <a:r>
+              <a:rPr lang="en-CA"/>
+              <a:t>Developing different approaches to AI governance.</a:t>
+            </a:r>
+          </a:p>
+        </p:txBody>
+      </p:sp>
+      <p:sp>
+        <p:nvSpPr>
+          <p:cNvPr id="8" name="Text Placeholder 4">
+            <a:extLst>
+              <a:ext uri="{FF2B5EF4-FFF2-40B4-BE49-F238E27FC236}">
+                <a16:creationId xmlns:a16="http://schemas.microsoft.com/office/drawing/2014/main" id="{844AAB80-8979-4B7D-7DA0-46313112627E}"/>
+              </a:ext>
+            </a:extLst>
+          </p:cNvPr>
+          <p:cNvSpPr txBox="1">
+            <a:spLocks/>
+          </p:cNvSpPr>
+          <p:nvPr/>
+        </p:nvSpPr>
+        <p:spPr>
+          <a:xfrm>
+            <a:off x="5118653" y="4138612"/>
+            <a:ext cx="6264414" cy="685800"/>
+          </a:xfrm>
+          <a:prstGeom prst="rect">
+            <a:avLst/>
+          </a:prstGeom>
+        </p:spPr>
+        <p:txBody>
+          <a:bodyPr vert="horz" lIns="91440" tIns="45720" rIns="91440" bIns="45720" rtlCol="0" anchor="ctr">
+            <a:noAutofit/>
+          </a:bodyPr>
+          <a:lstStyle>
+            <a:lvl1pPr marL="0" indent="0" algn="l" defTabSz="914400" rtl="0" eaLnBrk="1" latinLnBrk="0" hangingPunct="1">
+              <a:lnSpc>
+                <a:spcPct val="100000"/>
+              </a:lnSpc>
+              <a:spcBef>
+                <a:spcPts val="1000"/>
+              </a:spcBef>
+              <a:buClr>
+                <a:schemeClr val="accent1"/>
+              </a:buClr>
+              <a:buSzPct val="110000"/>
+              <a:buFont typeface="Wingdings" panose="05000000000000000000" pitchFamily="2" charset="2"/>
+              <a:buNone/>
+              <a:defRPr sz="2200" b="0" kern="1200" cap="all" baseline="0">
+                <a:solidFill>
+                  <a:schemeClr val="accent1"/>
+                </a:solidFill>
+                <a:effectLst/>
+                <a:latin typeface="+mn-lt"/>
+                <a:ea typeface="+mn-ea"/>
+                <a:cs typeface="+mn-cs"/>
+              </a:defRPr>
+            </a:lvl1pPr>
+            <a:lvl2pPr marL="457200" indent="0" algn="l" defTabSz="914400" rtl="0" eaLnBrk="1" latinLnBrk="0" hangingPunct="1">
+              <a:lnSpc>
+                <a:spcPct val="120000"/>
+              </a:lnSpc>
+              <a:spcBef>
+                <a:spcPts val="500"/>
+              </a:spcBef>
+              <a:buClr>
+                <a:schemeClr val="accent1"/>
+              </a:buClr>
+              <a:buSzPct val="110000"/>
+              <a:buFont typeface="Wingdings" panose="05000000000000000000" pitchFamily="2" charset="2"/>
+              <a:buNone/>
+              <a:defRPr sz="2000" b="1" kern="1200">
+                <a:solidFill>
+                  <a:schemeClr val="tx1"/>
+                </a:solidFill>
+                <a:effectLst/>
+                <a:latin typeface="+mn-lt"/>
+                <a:ea typeface="+mn-ea"/>
+                <a:cs typeface="+mn-cs"/>
+              </a:defRPr>
+            </a:lvl2pPr>
+            <a:lvl3pPr marL="914400" indent="0" algn="l" defTabSz="914400" rtl="0" eaLnBrk="1" latinLnBrk="0" hangingPunct="1">
+              <a:lnSpc>
+                <a:spcPct val="120000"/>
+              </a:lnSpc>
+              <a:spcBef>
+                <a:spcPts val="500"/>
+              </a:spcBef>
+              <a:buClr>
+                <a:schemeClr val="accent1"/>
+              </a:buClr>
+              <a:buSzPct val="110000"/>
+              <a:buFont typeface="Wingdings" panose="05000000000000000000" pitchFamily="2" charset="2"/>
+              <a:buNone/>
+              <a:defRPr sz="1800" b="1" kern="1200">
+                <a:solidFill>
+                  <a:schemeClr val="tx1"/>
+                </a:solidFill>
+                <a:effectLst/>
+                <a:latin typeface="+mn-lt"/>
+                <a:ea typeface="+mn-ea"/>
+                <a:cs typeface="+mn-cs"/>
+              </a:defRPr>
+            </a:lvl3pPr>
+            <a:lvl4pPr marL="1371600" indent="0" algn="l" defTabSz="914400" rtl="0" eaLnBrk="1" latinLnBrk="0" hangingPunct="1">
+              <a:lnSpc>
+                <a:spcPct val="120000"/>
+              </a:lnSpc>
+              <a:spcBef>
+                <a:spcPts val="500"/>
+              </a:spcBef>
+              <a:buClr>
+                <a:schemeClr val="accent1"/>
+              </a:buClr>
+              <a:buSzPct val="110000"/>
+              <a:buFont typeface="Wingdings" panose="05000000000000000000" pitchFamily="2" charset="2"/>
+              <a:buNone/>
+              <a:defRPr sz="1600" b="1" kern="1200">
+                <a:solidFill>
+                  <a:schemeClr val="tx1"/>
+                </a:solidFill>
+                <a:effectLst/>
+                <a:latin typeface="+mn-lt"/>
+                <a:ea typeface="+mn-ea"/>
+                <a:cs typeface="+mn-cs"/>
+              </a:defRPr>
+            </a:lvl4pPr>
+            <a:lvl5pPr marL="1828800" indent="0" algn="l" defTabSz="914400" rtl="0" eaLnBrk="1" latinLnBrk="0" hangingPunct="1">
+              <a:lnSpc>
+                <a:spcPct val="120000"/>
+              </a:lnSpc>
+              <a:spcBef>
+                <a:spcPts val="500"/>
+              </a:spcBef>
+              <a:buClr>
+                <a:schemeClr val="accent1"/>
+              </a:buClr>
+              <a:buSzPct val="110000"/>
+              <a:buFont typeface="Wingdings" panose="05000000000000000000" pitchFamily="2" charset="2"/>
+              <a:buNone/>
+              <a:defRPr sz="1600" b="1" kern="1200">
+                <a:solidFill>
+                  <a:schemeClr val="tx1"/>
+                </a:solidFill>
+                <a:effectLst/>
+                <a:latin typeface="+mn-lt"/>
+                <a:ea typeface="+mn-ea"/>
+                <a:cs typeface="+mn-cs"/>
+              </a:defRPr>
+            </a:lvl5pPr>
+            <a:lvl6pPr marL="2286000" indent="0" algn="l" defTabSz="914400" rtl="0" eaLnBrk="1" latinLnBrk="0" hangingPunct="1">
+              <a:lnSpc>
+                <a:spcPct val="120000"/>
+              </a:lnSpc>
+              <a:spcBef>
+                <a:spcPts val="500"/>
+              </a:spcBef>
+              <a:buClr>
+                <a:schemeClr val="accent1"/>
+              </a:buClr>
+              <a:buSzPct val="110000"/>
+              <a:buFont typeface="Wingdings" panose="05000000000000000000" pitchFamily="2" charset="2"/>
+              <a:buNone/>
+              <a:defRPr sz="1600" b="1" kern="1200">
+                <a:solidFill>
+                  <a:schemeClr val="tx1"/>
+                </a:solidFill>
+                <a:effectLst/>
+                <a:latin typeface="+mn-lt"/>
+                <a:ea typeface="+mn-ea"/>
+                <a:cs typeface="+mn-cs"/>
+              </a:defRPr>
+            </a:lvl6pPr>
+            <a:lvl7pPr marL="2743200" indent="0" algn="l" defTabSz="914400" rtl="0" eaLnBrk="1" latinLnBrk="0" hangingPunct="1">
+              <a:lnSpc>
+                <a:spcPct val="120000"/>
+              </a:lnSpc>
+              <a:spcBef>
+                <a:spcPts val="500"/>
+              </a:spcBef>
+              <a:buClr>
+                <a:schemeClr val="accent1"/>
+              </a:buClr>
+              <a:buSzPct val="110000"/>
+              <a:buFont typeface="Wingdings" panose="05000000000000000000" pitchFamily="2" charset="2"/>
+              <a:buNone/>
+              <a:defRPr sz="1600" b="1" kern="1200">
+                <a:solidFill>
+                  <a:schemeClr val="tx1"/>
+                </a:solidFill>
+                <a:effectLst/>
+                <a:latin typeface="+mn-lt"/>
+                <a:ea typeface="+mn-ea"/>
+                <a:cs typeface="+mn-cs"/>
+              </a:defRPr>
+            </a:lvl7pPr>
+            <a:lvl8pPr marL="3200400" indent="0" algn="l" defTabSz="914400" rtl="0" eaLnBrk="1" latinLnBrk="0" hangingPunct="1">
+              <a:lnSpc>
+                <a:spcPct val="120000"/>
+              </a:lnSpc>
+              <a:spcBef>
+                <a:spcPts val="500"/>
+              </a:spcBef>
+              <a:buClr>
+                <a:schemeClr val="accent1"/>
+              </a:buClr>
+              <a:buSzPct val="110000"/>
+              <a:buFont typeface="Wingdings" panose="05000000000000000000" pitchFamily="2" charset="2"/>
+              <a:buNone/>
+              <a:defRPr sz="1600" b="1" kern="1200">
+                <a:solidFill>
+                  <a:schemeClr val="tx1"/>
+                </a:solidFill>
+                <a:effectLst/>
+                <a:latin typeface="+mn-lt"/>
+                <a:ea typeface="+mn-ea"/>
+                <a:cs typeface="+mn-cs"/>
+              </a:defRPr>
+            </a:lvl8pPr>
+            <a:lvl9pPr marL="3657600" indent="0" algn="l" defTabSz="914400" rtl="0" eaLnBrk="1" latinLnBrk="0" hangingPunct="1">
+              <a:lnSpc>
+                <a:spcPct val="120000"/>
+              </a:lnSpc>
+              <a:spcBef>
+                <a:spcPts val="500"/>
+              </a:spcBef>
+              <a:buClr>
+                <a:schemeClr val="accent1"/>
+              </a:buClr>
+              <a:buSzPct val="110000"/>
+              <a:buFont typeface="Wingdings" panose="05000000000000000000" pitchFamily="2" charset="2"/>
+              <a:buNone/>
+              <a:defRPr sz="1600" b="1" kern="1200">
+                <a:solidFill>
+                  <a:schemeClr val="tx1"/>
+                </a:solidFill>
+                <a:effectLst/>
+                <a:latin typeface="+mn-lt"/>
+                <a:ea typeface="+mn-ea"/>
+                <a:cs typeface="+mn-cs"/>
+              </a:defRPr>
+            </a:lvl9pPr>
+          </a:lstStyle>
+          <a:p>
+            <a:r>
+              <a:rPr lang="en-CA" b="1"/>
+              <a:t>Global Challenge</a:t>
+            </a:r>
+            <a:endParaRPr lang="en-CA"/>
+          </a:p>
+        </p:txBody>
+      </p:sp>
+      <p:sp>
+        <p:nvSpPr>
+          <p:cNvPr id="9" name="Content Placeholder 5">
+            <a:extLst>
+              <a:ext uri="{FF2B5EF4-FFF2-40B4-BE49-F238E27FC236}">
+                <a16:creationId xmlns:a16="http://schemas.microsoft.com/office/drawing/2014/main" id="{D496A3E2-CB21-DA51-F5C7-3C5F6B147582}"/>
+              </a:ext>
+            </a:extLst>
+          </p:cNvPr>
+          <p:cNvSpPr txBox="1">
+            <a:spLocks/>
+          </p:cNvSpPr>
+          <p:nvPr/>
+        </p:nvSpPr>
+        <p:spPr>
+          <a:xfrm>
+            <a:off x="5118447" y="4824412"/>
+            <a:ext cx="6265588" cy="685800"/>
+          </a:xfrm>
+          <a:prstGeom prst="rect">
+            <a:avLst/>
+          </a:prstGeom>
+        </p:spPr>
+        <p:txBody>
+          <a:bodyPr vert="horz" lIns="91440" tIns="45720" rIns="91440" bIns="45720" rtlCol="0">
+            <a:normAutofit/>
+          </a:bodyPr>
+          <a:lstStyle>
+            <a:lvl1pPr marL="228600" indent="-228600" algn="l" defTabSz="914400" rtl="0" eaLnBrk="1" latinLnBrk="0" hangingPunct="1">
+              <a:lnSpc>
+                <a:spcPct val="120000"/>
+              </a:lnSpc>
+              <a:spcBef>
+                <a:spcPts val="1000"/>
+              </a:spcBef>
+              <a:buClr>
+                <a:schemeClr val="accent1"/>
+              </a:buClr>
+              <a:buSzPct val="110000"/>
+              <a:buFont typeface="Wingdings" panose="05000000000000000000" pitchFamily="2" charset="2"/>
+              <a:buChar char="§"/>
+              <a:defRPr sz="1800" kern="1200">
+                <a:solidFill>
+                  <a:schemeClr val="tx1"/>
+                </a:solidFill>
+                <a:effectLst/>
+                <a:latin typeface="+mn-lt"/>
+                <a:ea typeface="+mn-ea"/>
+                <a:cs typeface="+mn-cs"/>
+              </a:defRPr>
+            </a:lvl1pPr>
+            <a:lvl2pPr marL="685800" indent="-228600" algn="l" defTabSz="914400" rtl="0" eaLnBrk="1" latinLnBrk="0" hangingPunct="1">
+              <a:lnSpc>
+                <a:spcPct val="120000"/>
+              </a:lnSpc>
+              <a:spcBef>
+                <a:spcPts val="500"/>
+              </a:spcBef>
+              <a:buClr>
+                <a:schemeClr val="accent1"/>
+              </a:buClr>
+              <a:buSzPct val="110000"/>
+              <a:buFont typeface="Wingdings" panose="05000000000000000000" pitchFamily="2" charset="2"/>
+              <a:buChar char="§"/>
+              <a:defRPr sz="1600" kern="1200">
+                <a:solidFill>
+                  <a:schemeClr val="tx1"/>
+                </a:solidFill>
+                <a:effectLst/>
+                <a:latin typeface="+mn-lt"/>
+                <a:ea typeface="+mn-ea"/>
+                <a:cs typeface="+mn-cs"/>
+              </a:defRPr>
+            </a:lvl2pPr>
+            <a:lvl3pPr marL="1143000" indent="-228600" algn="l" defTabSz="914400" rtl="0" eaLnBrk="1" latinLnBrk="0" hangingPunct="1">
+              <a:lnSpc>
+                <a:spcPct val="120000"/>
+              </a:lnSpc>
+              <a:spcBef>
+                <a:spcPts val="500"/>
+              </a:spcBef>
+              <a:buClr>
+                <a:schemeClr val="accent1"/>
+              </a:buClr>
+              <a:buSzPct val="110000"/>
+              <a:buFont typeface="Wingdings" panose="05000000000000000000" pitchFamily="2" charset="2"/>
+              <a:buChar char="§"/>
+              <a:defRPr sz="1400" kern="1200">
+                <a:solidFill>
+                  <a:schemeClr val="tx1"/>
+                </a:solidFill>
+                <a:effectLst/>
+                <a:latin typeface="+mn-lt"/>
+                <a:ea typeface="+mn-ea"/>
+                <a:cs typeface="+mn-cs"/>
+              </a:defRPr>
+            </a:lvl3pPr>
+            <a:lvl4pPr marL="1600200" indent="-228600" algn="l" defTabSz="914400" rtl="0" eaLnBrk="1" latinLnBrk="0" hangingPunct="1">
+              <a:lnSpc>
+                <a:spcPct val="120000"/>
+              </a:lnSpc>
+              <a:spcBef>
+                <a:spcPts val="500"/>
+              </a:spcBef>
+              <a:buClr>
+                <a:schemeClr val="accent1"/>
+              </a:buClr>
+              <a:buSzPct val="110000"/>
+              <a:buFont typeface="Wingdings" panose="05000000000000000000" pitchFamily="2" charset="2"/>
+              <a:buChar char="§"/>
+              <a:defRPr sz="1200" kern="1200">
+                <a:solidFill>
+                  <a:schemeClr val="tx1"/>
+                </a:solidFill>
+                <a:effectLst/>
+                <a:latin typeface="+mn-lt"/>
+                <a:ea typeface="+mn-ea"/>
+                <a:cs typeface="+mn-cs"/>
+              </a:defRPr>
+            </a:lvl4pPr>
+            <a:lvl5pPr marL="2057400" indent="-228600" algn="l" defTabSz="914400" rtl="0" eaLnBrk="1" latinLnBrk="0" hangingPunct="1">
+              <a:lnSpc>
+                <a:spcPct val="120000"/>
+              </a:lnSpc>
+              <a:spcBef>
+                <a:spcPts val="500"/>
+              </a:spcBef>
+              <a:buClr>
+                <a:schemeClr val="accent1"/>
+              </a:buClr>
+              <a:buSzPct val="110000"/>
+              <a:buFont typeface="Wingdings" panose="05000000000000000000" pitchFamily="2" charset="2"/>
+              <a:buChar char="§"/>
+              <a:defRPr sz="1200" kern="1200">
+                <a:solidFill>
+                  <a:schemeClr val="tx1"/>
+                </a:solidFill>
+                <a:effectLst/>
+                <a:latin typeface="+mn-lt"/>
+                <a:ea typeface="+mn-ea"/>
+                <a:cs typeface="+mn-cs"/>
+              </a:defRPr>
+            </a:lvl5pPr>
+            <a:lvl6pPr marL="2514600" indent="-228600" algn="l" defTabSz="914400" rtl="0" eaLnBrk="1" latinLnBrk="0" hangingPunct="1">
+              <a:lnSpc>
+                <a:spcPct val="120000"/>
+              </a:lnSpc>
+              <a:spcBef>
+                <a:spcPts val="500"/>
+              </a:spcBef>
+              <a:buClr>
+                <a:schemeClr val="accent1"/>
+              </a:buClr>
+              <a:buSzPct val="110000"/>
+              <a:buFont typeface="Wingdings" panose="05000000000000000000" pitchFamily="2" charset="2"/>
+              <a:buChar char="§"/>
+              <a:defRPr sz="1200" kern="1200">
+                <a:solidFill>
+                  <a:schemeClr val="tx1"/>
+                </a:solidFill>
+                <a:effectLst/>
+                <a:latin typeface="+mn-lt"/>
+                <a:ea typeface="+mn-ea"/>
+                <a:cs typeface="+mn-cs"/>
+              </a:defRPr>
+            </a:lvl6pPr>
+            <a:lvl7pPr marL="2971800" indent="-228600" algn="l" defTabSz="914400" rtl="0" eaLnBrk="1" latinLnBrk="0" hangingPunct="1">
+              <a:lnSpc>
+                <a:spcPct val="120000"/>
+              </a:lnSpc>
+              <a:spcBef>
+                <a:spcPts val="500"/>
+              </a:spcBef>
+              <a:buClr>
+                <a:schemeClr val="accent1"/>
+              </a:buClr>
+              <a:buSzPct val="110000"/>
+              <a:buFont typeface="Wingdings" panose="05000000000000000000" pitchFamily="2" charset="2"/>
+              <a:buChar char="§"/>
+              <a:defRPr sz="1200" kern="1200">
+                <a:solidFill>
+                  <a:schemeClr val="tx1"/>
+                </a:solidFill>
+                <a:effectLst/>
+                <a:latin typeface="+mn-lt"/>
+                <a:ea typeface="+mn-ea"/>
+                <a:cs typeface="+mn-cs"/>
+              </a:defRPr>
+            </a:lvl7pPr>
+            <a:lvl8pPr marL="3429000" indent="-228600" algn="l" defTabSz="914400" rtl="0" eaLnBrk="1" latinLnBrk="0" hangingPunct="1">
+              <a:lnSpc>
+                <a:spcPct val="120000"/>
+              </a:lnSpc>
+              <a:spcBef>
+                <a:spcPts val="500"/>
+              </a:spcBef>
+              <a:buClr>
+                <a:schemeClr val="accent1"/>
+              </a:buClr>
+              <a:buSzPct val="110000"/>
+              <a:buFont typeface="Wingdings" panose="05000000000000000000" pitchFamily="2" charset="2"/>
+              <a:buChar char="§"/>
+              <a:defRPr sz="1200" kern="1200">
+                <a:solidFill>
+                  <a:schemeClr val="tx1"/>
+                </a:solidFill>
+                <a:effectLst/>
+                <a:latin typeface="+mn-lt"/>
+                <a:ea typeface="+mn-ea"/>
+                <a:cs typeface="+mn-cs"/>
+              </a:defRPr>
+            </a:lvl8pPr>
+            <a:lvl9pPr marL="3886200" indent="-228600" algn="l" defTabSz="914400" rtl="0" eaLnBrk="1" latinLnBrk="0" hangingPunct="1">
+              <a:lnSpc>
+                <a:spcPct val="120000"/>
+              </a:lnSpc>
+              <a:spcBef>
+                <a:spcPts val="500"/>
+              </a:spcBef>
+              <a:buClr>
+                <a:schemeClr val="accent1"/>
+              </a:buClr>
+              <a:buSzPct val="110000"/>
+              <a:buFont typeface="Wingdings" panose="05000000000000000000" pitchFamily="2" charset="2"/>
+              <a:buChar char="§"/>
+              <a:defRPr sz="1200" kern="1200">
+                <a:solidFill>
+                  <a:schemeClr val="tx1"/>
+                </a:solidFill>
+                <a:effectLst/>
+                <a:latin typeface="+mn-lt"/>
+                <a:ea typeface="+mn-ea"/>
+                <a:cs typeface="+mn-cs"/>
+              </a:defRPr>
+            </a:lvl9pPr>
+          </a:lstStyle>
+          <a:p>
+            <a:r>
+              <a:rPr lang="en-CA"/>
+              <a:t>fferent countries, different AI rules.</a:t>
+            </a:r>
+          </a:p>
+        </p:txBody>
+      </p:sp>
+    </p:spTree>
+    <p:extLst>
+      <p:ext uri="{BB962C8B-B14F-4D97-AF65-F5344CB8AC3E}">
+        <p14:creationId xmlns:p14="http://schemas.microsoft.com/office/powerpoint/2010/main" val="548489292"/>
+      </p:ext>
+    </p:extLst>
+  </p:cSld>
+  <p:clrMapOvr>
+    <a:masterClrMapping/>
+  </p:clrMapOvr>
+</p:sld>
+</file>
+
+<file path=ppt/slides/slide18.xml><?xml version="1.0" encoding="utf-8"?>
 <p:sld xmlns:a="http://schemas.openxmlformats.org/drawingml/2006/main" xmlns:r="http://schemas.openxmlformats.org/officeDocument/2006/relationships" xmlns:p="http://schemas.openxmlformats.org/presentationml/2006/main">
   <p:cSld>
     <p:spTree>
@@ -18235,7 +20345,7 @@
 </p:sld>
 </file>
 
-<file path=ppt/slides/slide8.xml><?xml version="1.0" encoding="utf-8"?>
+<file path=ppt/slides/slide19.xml><?xml version="1.0" encoding="utf-8"?>
 <p:sld xmlns:a="http://schemas.openxmlformats.org/drawingml/2006/main" xmlns:r="http://schemas.openxmlformats.org/officeDocument/2006/relationships" xmlns:p="http://schemas.openxmlformats.org/presentationml/2006/main">
   <p:cSld>
     <p:spTree>
@@ -18612,6 +20722,1507 @@
 </p:sld>
 </file>
 
+<file path=ppt/slides/slide2.xml><?xml version="1.0" encoding="utf-8"?>
+<p:sld xmlns:a="http://schemas.openxmlformats.org/drawingml/2006/main" xmlns:r="http://schemas.openxmlformats.org/officeDocument/2006/relationships" xmlns:p="http://schemas.openxmlformats.org/presentationml/2006/main">
+  <p:cSld>
+    <p:spTree>
+      <p:nvGrpSpPr>
+        <p:cNvPr id="1" name=""/>
+        <p:cNvGrpSpPr/>
+        <p:nvPr/>
+      </p:nvGrpSpPr>
+      <p:grpSpPr>
+        <a:xfrm>
+          <a:off x="0" y="0"/>
+          <a:ext cx="0" cy="0"/>
+          <a:chOff x="0" y="0"/>
+          <a:chExt cx="0" cy="0"/>
+        </a:xfrm>
+      </p:grpSpPr>
+      <p:sp>
+        <p:nvSpPr>
+          <p:cNvPr id="2" name="Title 1">
+            <a:extLst>
+              <a:ext uri="{FF2B5EF4-FFF2-40B4-BE49-F238E27FC236}">
+                <a16:creationId xmlns:a16="http://schemas.microsoft.com/office/drawing/2014/main" id="{C9CA9094-7E06-5F28-3D28-AD3F0FADC001}"/>
+              </a:ext>
+            </a:extLst>
+          </p:cNvPr>
+          <p:cNvSpPr>
+            <a:spLocks noGrp="1"/>
+          </p:cNvSpPr>
+          <p:nvPr>
+            <p:ph type="title"/>
+          </p:nvPr>
+        </p:nvSpPr>
+        <p:spPr/>
+        <p:txBody>
+          <a:bodyPr/>
+          <a:lstStyle/>
+          <a:p>
+            <a:r>
+              <a:rPr lang="en-US"/>
+              <a:t>Group members</a:t>
+            </a:r>
+          </a:p>
+        </p:txBody>
+      </p:sp>
+      <p:sp>
+        <p:nvSpPr>
+          <p:cNvPr id="3" name="Content Placeholder 2">
+            <a:extLst>
+              <a:ext uri="{FF2B5EF4-FFF2-40B4-BE49-F238E27FC236}">
+                <a16:creationId xmlns:a16="http://schemas.microsoft.com/office/drawing/2014/main" id="{31669D13-2AF7-23B2-22E2-B0BA0CFBB386}"/>
+              </a:ext>
+            </a:extLst>
+          </p:cNvPr>
+          <p:cNvSpPr>
+            <a:spLocks noGrp="1"/>
+          </p:cNvSpPr>
+          <p:nvPr>
+            <p:ph idx="1"/>
+          </p:nvPr>
+        </p:nvSpPr>
+        <p:spPr/>
+        <p:txBody>
+          <a:bodyPr/>
+          <a:lstStyle/>
+          <a:p>
+            <a:pPr lvl="0"/>
+            <a:r>
+              <a:rPr lang="en-CA"/>
+              <a:t>Sepanta Jazdarrehe / ID # 112488267 /  sjazdareh</a:t>
+            </a:r>
+          </a:p>
+          <a:p>
+            <a:pPr lvl="0"/>
+            <a:r>
+              <a:rPr lang="en-CA"/>
+              <a:t>Armita Kiashemshaki / ID # 039751144 / akiashemshaki</a:t>
+            </a:r>
+          </a:p>
+          <a:p>
+            <a:pPr lvl="0"/>
+            <a:r>
+              <a:rPr lang="en-CA"/>
+              <a:t>Merveille Solène Socko Damba / ID # 116470261 / mssocko-damba</a:t>
+            </a:r>
+          </a:p>
+          <a:p>
+            <a:pPr lvl="0"/>
+            <a:r>
+              <a:rPr lang="en-CA"/>
+              <a:t>Natalia Rodriguez Bogota / ID # 113986269 / Rodriguez-bogota</a:t>
+            </a:r>
+          </a:p>
+          <a:p>
+            <a:pPr marL="0" indent="0">
+              <a:buNone/>
+            </a:pPr>
+            <a:endParaRPr lang="en-US"/>
+          </a:p>
+        </p:txBody>
+      </p:sp>
+    </p:spTree>
+    <p:extLst>
+      <p:ext uri="{BB962C8B-B14F-4D97-AF65-F5344CB8AC3E}">
+        <p14:creationId xmlns:p14="http://schemas.microsoft.com/office/powerpoint/2010/main" val="742925437"/>
+      </p:ext>
+    </p:extLst>
+  </p:cSld>
+  <p:clrMapOvr>
+    <a:masterClrMapping/>
+  </p:clrMapOvr>
+</p:sld>
+</file>
+
+<file path=ppt/slides/slide3.xml><?xml version="1.0" encoding="utf-8"?>
+<p:sld xmlns:a="http://schemas.openxmlformats.org/drawingml/2006/main" xmlns:r="http://schemas.openxmlformats.org/officeDocument/2006/relationships" xmlns:p="http://schemas.openxmlformats.org/presentationml/2006/main">
+  <p:cSld>
+    <p:spTree>
+      <p:nvGrpSpPr>
+        <p:cNvPr id="1" name=""/>
+        <p:cNvGrpSpPr/>
+        <p:nvPr/>
+      </p:nvGrpSpPr>
+      <p:grpSpPr>
+        <a:xfrm>
+          <a:off x="0" y="0"/>
+          <a:ext cx="0" cy="0"/>
+          <a:chOff x="0" y="0"/>
+          <a:chExt cx="0" cy="0"/>
+        </a:xfrm>
+      </p:grpSpPr>
+      <p:sp>
+        <p:nvSpPr>
+          <p:cNvPr id="2" name="Title 1">
+            <a:extLst>
+              <a:ext uri="{FF2B5EF4-FFF2-40B4-BE49-F238E27FC236}">
+                <a16:creationId xmlns:a16="http://schemas.microsoft.com/office/drawing/2014/main" id="{6A2CF313-B230-7B58-08CD-2A120CB34542}"/>
+              </a:ext>
+            </a:extLst>
+          </p:cNvPr>
+          <p:cNvSpPr>
+            <a:spLocks noGrp="1"/>
+          </p:cNvSpPr>
+          <p:nvPr>
+            <p:ph type="title"/>
+          </p:nvPr>
+        </p:nvSpPr>
+        <p:spPr/>
+        <p:txBody>
+          <a:bodyPr>
+            <a:noAutofit/>
+          </a:bodyPr>
+          <a:lstStyle/>
+          <a:p>
+            <a:r>
+              <a:rPr lang="en-CA" sz="3200" b="1"/>
+              <a:t>Introduction</a:t>
+            </a:r>
+            <a:br>
+              <a:rPr lang="en-CA" sz="3200"/>
+            </a:br>
+            <a:endParaRPr lang="en-US" sz="3200"/>
+          </a:p>
+        </p:txBody>
+      </p:sp>
+      <p:sp>
+        <p:nvSpPr>
+          <p:cNvPr id="3" name="Content Placeholder 2">
+            <a:extLst>
+              <a:ext uri="{FF2B5EF4-FFF2-40B4-BE49-F238E27FC236}">
+                <a16:creationId xmlns:a16="http://schemas.microsoft.com/office/drawing/2014/main" id="{0B157E38-B330-A586-14A3-9B3804F39CDF}"/>
+              </a:ext>
+            </a:extLst>
+          </p:cNvPr>
+          <p:cNvSpPr>
+            <a:spLocks noGrp="1"/>
+          </p:cNvSpPr>
+          <p:nvPr>
+            <p:ph idx="1"/>
+          </p:nvPr>
+        </p:nvSpPr>
+        <p:spPr/>
+        <p:txBody>
+          <a:bodyPr/>
+          <a:lstStyle/>
+          <a:p>
+            <a:r>
+              <a:rPr lang="en-CA" sz="3200"/>
+              <a:t>AI Autonomy </a:t>
+            </a:r>
+          </a:p>
+          <a:p>
+            <a:r>
+              <a:rPr lang="en-CA" sz="3200"/>
+              <a:t>Cybersecurity </a:t>
+            </a:r>
+          </a:p>
+          <a:p>
+            <a:r>
+              <a:rPr lang="en-CA" sz="3200"/>
+              <a:t>Legal Responsibility </a:t>
+            </a:r>
+          </a:p>
+          <a:p>
+            <a:r>
+              <a:rPr lang="en-CA" sz="3200"/>
+              <a:t>Government Regulation</a:t>
+            </a:r>
+          </a:p>
+          <a:p>
+            <a:endParaRPr lang="en-US"/>
+          </a:p>
+        </p:txBody>
+      </p:sp>
+      <p:pic>
+        <p:nvPicPr>
+          <p:cNvPr id="4" name="Audio Recording Oct 21, 2026 at 5:22:00 AM">
+            <a:hlinkClick r:id="" action="ppaction://media"/>
+            <a:extLst>
+              <a:ext uri="{FF2B5EF4-FFF2-40B4-BE49-F238E27FC236}">
+                <a16:creationId xmlns:a16="http://schemas.microsoft.com/office/drawing/2014/main" id="{ED560B19-E8AE-72BB-D5AA-10C0B21C028C}"/>
+              </a:ext>
+            </a:extLst>
+          </p:cNvPr>
+          <p:cNvPicPr>
+            <a:picLocks noChangeAspect="1"/>
+          </p:cNvPicPr>
+          <p:nvPr>
+            <a:audioFile r:link="rId2"/>
+            <p:extLst>
+              <p:ext uri="{DAA4B4D4-6D71-4841-9C94-3DE7FCFB9230}">
+                <p14:media xmlns:p14="http://schemas.microsoft.com/office/powerpoint/2010/main" r:embed="rId1"/>
+              </p:ext>
+            </p:extLst>
+          </p:nvPr>
+        </p:nvPicPr>
+        <p:blipFill>
+          <a:blip r:embed="rId4"/>
+          <a:stretch>
+            <a:fillRect/>
+          </a:stretch>
+        </p:blipFill>
+        <p:spPr>
+          <a:xfrm>
+            <a:off x="5689600" y="3022600"/>
+            <a:ext cx="812800" cy="812800"/>
+          </a:xfrm>
+          <a:prstGeom prst="rect">
+            <a:avLst/>
+          </a:prstGeom>
+        </p:spPr>
+      </p:pic>
+    </p:spTree>
+    <p:extLst>
+      <p:ext uri="{BB962C8B-B14F-4D97-AF65-F5344CB8AC3E}">
+        <p14:creationId xmlns:p14="http://schemas.microsoft.com/office/powerpoint/2010/main" val="4264231756"/>
+      </p:ext>
+    </p:extLst>
+  </p:cSld>
+  <p:clrMapOvr>
+    <a:masterClrMapping/>
+  </p:clrMapOvr>
+  <p:timing>
+    <p:tnLst>
+      <p:par>
+        <p:cTn id="1" dur="indefinite" restart="never" nodeType="tmRoot">
+          <p:childTnLst>
+            <p:seq concurrent="1" nextAc="seek">
+              <p:cTn id="2" dur="indefinite" nodeType="mainSeq">
+                <p:childTnLst>
+                  <p:par>
+                    <p:cTn id="3" fill="hold">
+                      <p:stCondLst>
+                        <p:cond delay="indefinite"/>
+                      </p:stCondLst>
+                      <p:childTnLst>
+                        <p:par>
+                          <p:cTn id="4" fill="hold">
+                            <p:stCondLst>
+                              <p:cond delay="0"/>
+                            </p:stCondLst>
+                            <p:childTnLst>
+                              <p:par>
+                                <p:cTn id="5" presetID="1" presetClass="mediacall" presetSubtype="0" fill="hold" nodeType="clickEffect">
+                                  <p:stCondLst>
+                                    <p:cond delay="0"/>
+                                  </p:stCondLst>
+                                  <p:childTnLst>
+                                    <p:cmd type="call" cmd="playFrom(0.0)">
+                                      <p:cBhvr>
+                                        <p:cTn id="6" dur="10940" fill="hold"/>
+                                        <p:tgtEl>
+                                          <p:spTgt spid="4"/>
+                                        </p:tgtEl>
+                                      </p:cBhvr>
+                                    </p:cmd>
+                                  </p:childTnLst>
+                                </p:cTn>
+                              </p:par>
+                            </p:childTnLst>
+                          </p:cTn>
+                        </p:par>
+                      </p:childTnLst>
+                    </p:cTn>
+                  </p:par>
+                </p:childTnLst>
+              </p:cTn>
+              <p:prevCondLst>
+                <p:cond evt="onPrev" delay="0">
+                  <p:tgtEl>
+                    <p:sldTgt/>
+                  </p:tgtEl>
+                </p:cond>
+              </p:prevCondLst>
+              <p:nextCondLst>
+                <p:cond evt="onNext" delay="0">
+                  <p:tgtEl>
+                    <p:sldTgt/>
+                  </p:tgtEl>
+                </p:cond>
+              </p:nextCondLst>
+            </p:seq>
+            <p:audio>
+              <p:cMediaNode vol="80000">
+                <p:cTn id="7" fill="hold" display="0">
+                  <p:stCondLst>
+                    <p:cond delay="indefinite"/>
+                  </p:stCondLst>
+                  <p:endCondLst>
+                    <p:cond evt="onStopAudio" delay="0">
+                      <p:tgtEl>
+                        <p:sldTgt/>
+                      </p:tgtEl>
+                    </p:cond>
+                  </p:endCondLst>
+                </p:cTn>
+                <p:tgtEl>
+                  <p:spTgt spid="4"/>
+                </p:tgtEl>
+              </p:cMediaNode>
+            </p:audio>
+          </p:childTnLst>
+        </p:cTn>
+      </p:par>
+    </p:tnLst>
+  </p:timing>
+</p:sld>
+</file>
+
+<file path=ppt/slides/slide4.xml><?xml version="1.0" encoding="utf-8"?>
+<p:sld xmlns:a="http://schemas.openxmlformats.org/drawingml/2006/main" xmlns:r="http://schemas.openxmlformats.org/officeDocument/2006/relationships" xmlns:p="http://schemas.openxmlformats.org/presentationml/2006/main">
+  <p:cSld>
+    <p:spTree>
+      <p:nvGrpSpPr>
+        <p:cNvPr id="1" name=""/>
+        <p:cNvGrpSpPr/>
+        <p:nvPr/>
+      </p:nvGrpSpPr>
+      <p:grpSpPr>
+        <a:xfrm>
+          <a:off x="0" y="0"/>
+          <a:ext cx="0" cy="0"/>
+          <a:chOff x="0" y="0"/>
+          <a:chExt cx="0" cy="0"/>
+        </a:xfrm>
+      </p:grpSpPr>
+      <p:sp>
+        <p:nvSpPr>
+          <p:cNvPr id="2" name="Title 1">
+            <a:extLst>
+              <a:ext uri="{FF2B5EF4-FFF2-40B4-BE49-F238E27FC236}">
+                <a16:creationId xmlns:a16="http://schemas.microsoft.com/office/drawing/2014/main" id="{5E0D1876-A9F7-D11D-D7BC-A9EF2691934D}"/>
+              </a:ext>
+            </a:extLst>
+          </p:cNvPr>
+          <p:cNvSpPr>
+            <a:spLocks noGrp="1"/>
+          </p:cNvSpPr>
+          <p:nvPr>
+            <p:ph type="title"/>
+          </p:nvPr>
+        </p:nvSpPr>
+        <p:spPr>
+          <a:xfrm>
+            <a:off x="3350888" y="2409581"/>
+            <a:ext cx="5490224" cy="1689390"/>
+          </a:xfrm>
+        </p:spPr>
+        <p:txBody>
+          <a:bodyPr>
+            <a:normAutofit/>
+          </a:bodyPr>
+          <a:lstStyle/>
+          <a:p>
+            <a:r>
+              <a:rPr lang="en-CA" b="1"/>
+              <a:t>AI Autonomy Risks</a:t>
+            </a:r>
+            <a:endParaRPr lang="en-CA"/>
+          </a:p>
+        </p:txBody>
+      </p:sp>
+    </p:spTree>
+    <p:extLst>
+      <p:ext uri="{BB962C8B-B14F-4D97-AF65-F5344CB8AC3E}">
+        <p14:creationId xmlns:p14="http://schemas.microsoft.com/office/powerpoint/2010/main" val="1406958433"/>
+      </p:ext>
+    </p:extLst>
+  </p:cSld>
+  <p:clrMapOvr>
+    <a:masterClrMapping/>
+  </p:clrMapOvr>
+</p:sld>
+</file>
+
+<file path=ppt/slides/slide5.xml><?xml version="1.0" encoding="utf-8"?>
+<p:sld xmlns:a="http://schemas.openxmlformats.org/drawingml/2006/main" xmlns:r="http://schemas.openxmlformats.org/officeDocument/2006/relationships" xmlns:p="http://schemas.openxmlformats.org/presentationml/2006/main">
+  <p:cSld>
+    <p:spTree>
+      <p:nvGrpSpPr>
+        <p:cNvPr id="1" name="">
+          <a:extLst>
+            <a:ext uri="{FF2B5EF4-FFF2-40B4-BE49-F238E27FC236}">
+              <a16:creationId xmlns:a16="http://schemas.microsoft.com/office/drawing/2014/main" id="{C32D75C0-47CC-0DB9-C9D3-3FF6EE2B63A7}"/>
+            </a:ext>
+          </a:extLst>
+        </p:cNvPr>
+        <p:cNvGrpSpPr/>
+        <p:nvPr/>
+      </p:nvGrpSpPr>
+      <p:grpSpPr>
+        <a:xfrm>
+          <a:off x="0" y="0"/>
+          <a:ext cx="0" cy="0"/>
+          <a:chOff x="0" y="0"/>
+          <a:chExt cx="0" cy="0"/>
+        </a:xfrm>
+      </p:grpSpPr>
+      <p:sp>
+        <p:nvSpPr>
+          <p:cNvPr id="2" name="Title 1">
+            <a:extLst>
+              <a:ext uri="{FF2B5EF4-FFF2-40B4-BE49-F238E27FC236}">
+                <a16:creationId xmlns:a16="http://schemas.microsoft.com/office/drawing/2014/main" id="{C78DD2CB-A9FD-9AB1-AC4D-1EDA992FFEEA}"/>
+              </a:ext>
+            </a:extLst>
+          </p:cNvPr>
+          <p:cNvSpPr>
+            <a:spLocks noGrp="1"/>
+          </p:cNvSpPr>
+          <p:nvPr>
+            <p:ph type="title"/>
+          </p:nvPr>
+        </p:nvSpPr>
+        <p:spPr/>
+        <p:txBody>
+          <a:bodyPr/>
+          <a:lstStyle/>
+          <a:p>
+            <a:r>
+              <a:rPr lang="en-CA" b="1"/>
+              <a:t>5 Risks of AI</a:t>
+            </a:r>
+            <a:endParaRPr lang="en-US"/>
+          </a:p>
+        </p:txBody>
+      </p:sp>
+      <p:sp>
+        <p:nvSpPr>
+          <p:cNvPr id="4" name="Content Placeholder 3">
+            <a:extLst>
+              <a:ext uri="{FF2B5EF4-FFF2-40B4-BE49-F238E27FC236}">
+                <a16:creationId xmlns:a16="http://schemas.microsoft.com/office/drawing/2014/main" id="{BAD941FD-E48F-3DE8-906B-CA8DE3123ABA}"/>
+              </a:ext>
+            </a:extLst>
+          </p:cNvPr>
+          <p:cNvSpPr>
+            <a:spLocks noGrp="1"/>
+          </p:cNvSpPr>
+          <p:nvPr>
+            <p:ph sz="half" idx="2"/>
+          </p:nvPr>
+        </p:nvSpPr>
+        <p:spPr>
+          <a:xfrm>
+            <a:off x="5220387" y="1732147"/>
+            <a:ext cx="6264350" cy="1696853"/>
+          </a:xfrm>
+        </p:spPr>
+        <p:txBody>
+          <a:bodyPr>
+            <a:normAutofit fontScale="25000" lnSpcReduction="20000"/>
+          </a:bodyPr>
+          <a:lstStyle/>
+          <a:p>
+            <a:pPr marL="342900" indent="-342900">
+              <a:buFont typeface="+mj-lt"/>
+              <a:buAutoNum type="arabicPeriod"/>
+            </a:pPr>
+            <a:r>
+              <a:rPr lang="en-CA" sz="7200" b="1"/>
+              <a:t>Unintended Behavior</a:t>
+            </a:r>
+            <a:r>
+              <a:rPr lang="en-CA" sz="7200"/>
+              <a:t> — AI may act beyond its intended goals.</a:t>
+            </a:r>
+          </a:p>
+          <a:p>
+            <a:pPr marL="342900" indent="-342900">
+              <a:buFont typeface="+mj-lt"/>
+              <a:buAutoNum type="arabicPeriod"/>
+            </a:pPr>
+            <a:r>
+              <a:rPr lang="en-CA" sz="7200" b="1"/>
+              <a:t>Deceptive Behavior</a:t>
+            </a:r>
+            <a:r>
+              <a:rPr lang="en-CA" sz="7200"/>
+              <a:t> — AI may learn to cheat or provide misleading information.</a:t>
+            </a:r>
+          </a:p>
+          <a:p>
+            <a:pPr marL="342900" indent="-342900">
+              <a:buFont typeface="+mj-lt"/>
+              <a:buAutoNum type="arabicPeriod"/>
+            </a:pPr>
+            <a:r>
+              <a:rPr lang="en-CA" sz="7200" b="1"/>
+              <a:t>Incorrect Identification</a:t>
+            </a:r>
+            <a:r>
+              <a:rPr lang="en-CA" sz="7200"/>
+              <a:t> — AI may make mistakes when identifying people or situations.</a:t>
+            </a:r>
+          </a:p>
+          <a:p>
+            <a:pPr marL="342900" indent="-342900">
+              <a:buFont typeface="+mj-lt"/>
+              <a:buAutoNum type="arabicPeriod"/>
+            </a:pPr>
+            <a:r>
+              <a:rPr lang="en-CA" sz="7200" b="1"/>
+              <a:t>Bias and Discrimination</a:t>
+            </a:r>
+            <a:r>
+              <a:rPr lang="en-CA" sz="7200"/>
+              <a:t> — AI may reinforce biases in its training data.</a:t>
+            </a:r>
+          </a:p>
+          <a:p>
+            <a:pPr marL="342900" indent="-342900">
+              <a:buFont typeface="+mj-lt"/>
+              <a:buAutoNum type="arabicPeriod"/>
+            </a:pPr>
+            <a:r>
+              <a:rPr lang="en-CA" sz="7200" b="1"/>
+              <a:t>Security Vulnerabilities</a:t>
+            </a:r>
+            <a:r>
+              <a:rPr lang="en-CA" sz="7200"/>
+              <a:t> — Autonomous AI may create risks when accessing sensitive systems.</a:t>
+            </a:r>
+          </a:p>
+          <a:p>
+            <a:pPr marL="342900" indent="-342900">
+              <a:buFont typeface="+mj-lt"/>
+              <a:buAutoNum type="arabicPeriod"/>
+            </a:pPr>
+            <a:endParaRPr lang="en-US"/>
+          </a:p>
+        </p:txBody>
+      </p:sp>
+    </p:spTree>
+    <p:extLst>
+      <p:ext uri="{BB962C8B-B14F-4D97-AF65-F5344CB8AC3E}">
+        <p14:creationId xmlns:p14="http://schemas.microsoft.com/office/powerpoint/2010/main" val="2349614846"/>
+      </p:ext>
+    </p:extLst>
+  </p:cSld>
+  <p:clrMapOvr>
+    <a:masterClrMapping/>
+  </p:clrMapOvr>
+</p:sld>
+</file>
+
+<file path=ppt/slides/slide6.xml><?xml version="1.0" encoding="utf-8"?>
+<p:sld xmlns:a="http://schemas.openxmlformats.org/drawingml/2006/main" xmlns:r="http://schemas.openxmlformats.org/officeDocument/2006/relationships" xmlns:p="http://schemas.openxmlformats.org/presentationml/2006/main">
+  <p:cSld>
+    <p:spTree>
+      <p:nvGrpSpPr>
+        <p:cNvPr id="1" name=""/>
+        <p:cNvGrpSpPr/>
+        <p:nvPr/>
+      </p:nvGrpSpPr>
+      <p:grpSpPr>
+        <a:xfrm>
+          <a:off x="0" y="0"/>
+          <a:ext cx="0" cy="0"/>
+          <a:chOff x="0" y="0"/>
+          <a:chExt cx="0" cy="0"/>
+        </a:xfrm>
+      </p:grpSpPr>
+      <p:sp>
+        <p:nvSpPr>
+          <p:cNvPr id="2" name="Title 1">
+            <a:extLst>
+              <a:ext uri="{FF2B5EF4-FFF2-40B4-BE49-F238E27FC236}">
+                <a16:creationId xmlns:a16="http://schemas.microsoft.com/office/drawing/2014/main" id="{09153823-CB98-8271-F585-18324734119A}"/>
+              </a:ext>
+            </a:extLst>
+          </p:cNvPr>
+          <p:cNvSpPr>
+            <a:spLocks noGrp="1"/>
+          </p:cNvSpPr>
+          <p:nvPr>
+            <p:ph type="title"/>
+          </p:nvPr>
+        </p:nvSpPr>
+        <p:spPr/>
+        <p:txBody>
+          <a:bodyPr/>
+          <a:lstStyle/>
+          <a:p>
+            <a:r>
+              <a:rPr lang="en-CA" b="1"/>
+              <a:t>AI Scientists Risk</a:t>
+            </a:r>
+            <a:endParaRPr lang="en-US"/>
+          </a:p>
+        </p:txBody>
+      </p:sp>
+      <p:pic>
+        <p:nvPicPr>
+          <p:cNvPr id="16" name="Picture 15">
+            <a:extLst>
+              <a:ext uri="{FF2B5EF4-FFF2-40B4-BE49-F238E27FC236}">
+                <a16:creationId xmlns:a16="http://schemas.microsoft.com/office/drawing/2014/main" id="{0D9EA4B4-5052-97F5-9923-21950FF82408}"/>
+              </a:ext>
+            </a:extLst>
+          </p:cNvPr>
+          <p:cNvPicPr>
+            <a:picLocks noChangeAspect="1"/>
+          </p:cNvPicPr>
+          <p:nvPr/>
+        </p:nvPicPr>
+        <p:blipFill>
+          <a:blip r:embed="rId2"/>
+          <a:stretch>
+            <a:fillRect/>
+          </a:stretch>
+        </p:blipFill>
+        <p:spPr>
+          <a:xfrm>
+            <a:off x="5844357" y="530353"/>
+            <a:ext cx="5058180" cy="5981700"/>
+          </a:xfrm>
+          <a:prstGeom prst="rect">
+            <a:avLst/>
+          </a:prstGeom>
+        </p:spPr>
+      </p:pic>
+    </p:spTree>
+    <p:extLst>
+      <p:ext uri="{BB962C8B-B14F-4D97-AF65-F5344CB8AC3E}">
+        <p14:creationId xmlns:p14="http://schemas.microsoft.com/office/powerpoint/2010/main" val="452360414"/>
+      </p:ext>
+    </p:extLst>
+  </p:cSld>
+  <p:clrMapOvr>
+    <a:masterClrMapping/>
+  </p:clrMapOvr>
+</p:sld>
+</file>
+
+<file path=ppt/slides/slide7.xml><?xml version="1.0" encoding="utf-8"?>
+<p:sld xmlns:a="http://schemas.openxmlformats.org/drawingml/2006/main" xmlns:r="http://schemas.openxmlformats.org/officeDocument/2006/relationships" xmlns:p="http://schemas.openxmlformats.org/presentationml/2006/main">
+  <p:cSld>
+    <p:spTree>
+      <p:nvGrpSpPr>
+        <p:cNvPr id="1" name=""/>
+        <p:cNvGrpSpPr/>
+        <p:nvPr/>
+      </p:nvGrpSpPr>
+      <p:grpSpPr>
+        <a:xfrm>
+          <a:off x="0" y="0"/>
+          <a:ext cx="0" cy="0"/>
+          <a:chOff x="0" y="0"/>
+          <a:chExt cx="0" cy="0"/>
+        </a:xfrm>
+      </p:grpSpPr>
+      <p:sp>
+        <p:nvSpPr>
+          <p:cNvPr id="2" name="Title 1">
+            <a:extLst>
+              <a:ext uri="{FF2B5EF4-FFF2-40B4-BE49-F238E27FC236}">
+                <a16:creationId xmlns:a16="http://schemas.microsoft.com/office/drawing/2014/main" id="{8A0480E2-A26C-224E-65D6-EF28D679BF10}"/>
+              </a:ext>
+            </a:extLst>
+          </p:cNvPr>
+          <p:cNvSpPr>
+            <a:spLocks noGrp="1"/>
+          </p:cNvSpPr>
+          <p:nvPr>
+            <p:ph type="title"/>
+          </p:nvPr>
+        </p:nvSpPr>
+        <p:spPr/>
+        <p:txBody>
+          <a:bodyPr/>
+          <a:lstStyle/>
+          <a:p>
+            <a:r>
+              <a:rPr lang="en-CA" b="1"/>
+              <a:t>Who Is Responsible for AI Mistakes?</a:t>
+            </a:r>
+            <a:endParaRPr lang="en-CA"/>
+          </a:p>
+        </p:txBody>
+      </p:sp>
+      <p:sp>
+        <p:nvSpPr>
+          <p:cNvPr id="3" name="Content Placeholder 2">
+            <a:extLst>
+              <a:ext uri="{FF2B5EF4-FFF2-40B4-BE49-F238E27FC236}">
+                <a16:creationId xmlns:a16="http://schemas.microsoft.com/office/drawing/2014/main" id="{D952CFCB-493E-85FC-4318-A50D9BAB7466}"/>
+              </a:ext>
+            </a:extLst>
+          </p:cNvPr>
+          <p:cNvSpPr>
+            <a:spLocks noGrp="1"/>
+          </p:cNvSpPr>
+          <p:nvPr>
+            <p:ph sz="half" idx="1"/>
+          </p:nvPr>
+        </p:nvSpPr>
+        <p:spPr>
+          <a:xfrm>
+            <a:off x="5104495" y="1603287"/>
+            <a:ext cx="2567809" cy="1673313"/>
+          </a:xfrm>
+        </p:spPr>
+        <p:txBody>
+          <a:bodyPr/>
+          <a:lstStyle/>
+          <a:p>
+            <a:pPr marL="0" indent="0">
+              <a:buNone/>
+            </a:pPr>
+            <a:r>
+              <a:rPr lang="en-CA" b="1"/>
+              <a:t>Companies</a:t>
+            </a:r>
+            <a:endParaRPr lang="en-CA"/>
+          </a:p>
+          <a:p>
+            <a:r>
+              <a:rPr lang="en-CA"/>
+              <a:t>Responsible for AI tools they provide or use.</a:t>
+            </a:r>
+          </a:p>
+        </p:txBody>
+      </p:sp>
+      <p:sp>
+        <p:nvSpPr>
+          <p:cNvPr id="4" name="Content Placeholder 3">
+            <a:extLst>
+              <a:ext uri="{FF2B5EF4-FFF2-40B4-BE49-F238E27FC236}">
+                <a16:creationId xmlns:a16="http://schemas.microsoft.com/office/drawing/2014/main" id="{912D6834-C8C2-14D6-4A10-E8F5CAB734CD}"/>
+              </a:ext>
+            </a:extLst>
+          </p:cNvPr>
+          <p:cNvSpPr>
+            <a:spLocks noGrp="1"/>
+          </p:cNvSpPr>
+          <p:nvPr>
+            <p:ph sz="half" idx="2"/>
+          </p:nvPr>
+        </p:nvSpPr>
+        <p:spPr>
+          <a:xfrm>
+            <a:off x="5118447" y="3672162"/>
+            <a:ext cx="2567809" cy="2110452"/>
+          </a:xfrm>
+        </p:spPr>
+        <p:txBody>
+          <a:bodyPr/>
+          <a:lstStyle/>
+          <a:p>
+            <a:pPr marL="0" indent="0">
+              <a:buNone/>
+            </a:pPr>
+            <a:r>
+              <a:rPr lang="en-CA" b="1"/>
+              <a:t>Human Operators</a:t>
+            </a:r>
+            <a:endParaRPr lang="en-CA"/>
+          </a:p>
+          <a:p>
+            <a:r>
+              <a:rPr lang="en-CA"/>
+              <a:t>May be responsible for failing to supervise AI.</a:t>
+            </a:r>
+          </a:p>
+        </p:txBody>
+      </p:sp>
+      <p:sp>
+        <p:nvSpPr>
+          <p:cNvPr id="8" name="Content Placeholder 3">
+            <a:extLst>
+              <a:ext uri="{FF2B5EF4-FFF2-40B4-BE49-F238E27FC236}">
+                <a16:creationId xmlns:a16="http://schemas.microsoft.com/office/drawing/2014/main" id="{86869F15-0761-5ADC-D64B-D5E6B4C20CA3}"/>
+              </a:ext>
+            </a:extLst>
+          </p:cNvPr>
+          <p:cNvSpPr txBox="1">
+            <a:spLocks/>
+          </p:cNvSpPr>
+          <p:nvPr/>
+        </p:nvSpPr>
+        <p:spPr>
+          <a:xfrm>
+            <a:off x="8386970" y="3581400"/>
+            <a:ext cx="2567809" cy="2110452"/>
+          </a:xfrm>
+          <a:prstGeom prst="rect">
+            <a:avLst/>
+          </a:prstGeom>
+        </p:spPr>
+        <p:txBody>
+          <a:bodyPr vert="horz" lIns="91440" tIns="45720" rIns="91440" bIns="45720" rtlCol="0">
+            <a:normAutofit/>
+          </a:bodyPr>
+          <a:lstStyle>
+            <a:lvl1pPr marL="228600" indent="-228600" algn="l" defTabSz="914400" rtl="0" eaLnBrk="1" latinLnBrk="0" hangingPunct="1">
+              <a:lnSpc>
+                <a:spcPct val="120000"/>
+              </a:lnSpc>
+              <a:spcBef>
+                <a:spcPts val="1000"/>
+              </a:spcBef>
+              <a:buClr>
+                <a:schemeClr val="accent1"/>
+              </a:buClr>
+              <a:buSzPct val="110000"/>
+              <a:buFont typeface="Wingdings" panose="05000000000000000000" pitchFamily="2" charset="2"/>
+              <a:buChar char="§"/>
+              <a:defRPr sz="1800" kern="1200">
+                <a:solidFill>
+                  <a:schemeClr val="tx1"/>
+                </a:solidFill>
+                <a:effectLst/>
+                <a:latin typeface="+mn-lt"/>
+                <a:ea typeface="+mn-ea"/>
+                <a:cs typeface="+mn-cs"/>
+              </a:defRPr>
+            </a:lvl1pPr>
+            <a:lvl2pPr marL="685800" indent="-228600" algn="l" defTabSz="914400" rtl="0" eaLnBrk="1" latinLnBrk="0" hangingPunct="1">
+              <a:lnSpc>
+                <a:spcPct val="120000"/>
+              </a:lnSpc>
+              <a:spcBef>
+                <a:spcPts val="500"/>
+              </a:spcBef>
+              <a:buClr>
+                <a:schemeClr val="accent1"/>
+              </a:buClr>
+              <a:buSzPct val="110000"/>
+              <a:buFont typeface="Wingdings" panose="05000000000000000000" pitchFamily="2" charset="2"/>
+              <a:buChar char="§"/>
+              <a:defRPr sz="1600" kern="1200">
+                <a:solidFill>
+                  <a:schemeClr val="tx1"/>
+                </a:solidFill>
+                <a:effectLst/>
+                <a:latin typeface="+mn-lt"/>
+                <a:ea typeface="+mn-ea"/>
+                <a:cs typeface="+mn-cs"/>
+              </a:defRPr>
+            </a:lvl2pPr>
+            <a:lvl3pPr marL="1143000" indent="-228600" algn="l" defTabSz="914400" rtl="0" eaLnBrk="1" latinLnBrk="0" hangingPunct="1">
+              <a:lnSpc>
+                <a:spcPct val="120000"/>
+              </a:lnSpc>
+              <a:spcBef>
+                <a:spcPts val="500"/>
+              </a:spcBef>
+              <a:buClr>
+                <a:schemeClr val="accent1"/>
+              </a:buClr>
+              <a:buSzPct val="110000"/>
+              <a:buFont typeface="Wingdings" panose="05000000000000000000" pitchFamily="2" charset="2"/>
+              <a:buChar char="§"/>
+              <a:defRPr sz="1400" kern="1200">
+                <a:solidFill>
+                  <a:schemeClr val="tx1"/>
+                </a:solidFill>
+                <a:effectLst/>
+                <a:latin typeface="+mn-lt"/>
+                <a:ea typeface="+mn-ea"/>
+                <a:cs typeface="+mn-cs"/>
+              </a:defRPr>
+            </a:lvl3pPr>
+            <a:lvl4pPr marL="1600200" indent="-228600" algn="l" defTabSz="914400" rtl="0" eaLnBrk="1" latinLnBrk="0" hangingPunct="1">
+              <a:lnSpc>
+                <a:spcPct val="120000"/>
+              </a:lnSpc>
+              <a:spcBef>
+                <a:spcPts val="500"/>
+              </a:spcBef>
+              <a:buClr>
+                <a:schemeClr val="accent1"/>
+              </a:buClr>
+              <a:buSzPct val="110000"/>
+              <a:buFont typeface="Wingdings" panose="05000000000000000000" pitchFamily="2" charset="2"/>
+              <a:buChar char="§"/>
+              <a:defRPr sz="1200" kern="1200">
+                <a:solidFill>
+                  <a:schemeClr val="tx1"/>
+                </a:solidFill>
+                <a:effectLst/>
+                <a:latin typeface="+mn-lt"/>
+                <a:ea typeface="+mn-ea"/>
+                <a:cs typeface="+mn-cs"/>
+              </a:defRPr>
+            </a:lvl4pPr>
+            <a:lvl5pPr marL="2057400" indent="-228600" algn="l" defTabSz="914400" rtl="0" eaLnBrk="1" latinLnBrk="0" hangingPunct="1">
+              <a:lnSpc>
+                <a:spcPct val="120000"/>
+              </a:lnSpc>
+              <a:spcBef>
+                <a:spcPts val="500"/>
+              </a:spcBef>
+              <a:buClr>
+                <a:schemeClr val="accent1"/>
+              </a:buClr>
+              <a:buSzPct val="110000"/>
+              <a:buFont typeface="Wingdings" panose="05000000000000000000" pitchFamily="2" charset="2"/>
+              <a:buChar char="§"/>
+              <a:defRPr sz="1200" kern="1200">
+                <a:solidFill>
+                  <a:schemeClr val="tx1"/>
+                </a:solidFill>
+                <a:effectLst/>
+                <a:latin typeface="+mn-lt"/>
+                <a:ea typeface="+mn-ea"/>
+                <a:cs typeface="+mn-cs"/>
+              </a:defRPr>
+            </a:lvl5pPr>
+            <a:lvl6pPr marL="2514600" indent="-228600" algn="l" defTabSz="914400" rtl="0" eaLnBrk="1" latinLnBrk="0" hangingPunct="1">
+              <a:lnSpc>
+                <a:spcPct val="120000"/>
+              </a:lnSpc>
+              <a:spcBef>
+                <a:spcPts val="500"/>
+              </a:spcBef>
+              <a:buClr>
+                <a:schemeClr val="accent1"/>
+              </a:buClr>
+              <a:buSzPct val="110000"/>
+              <a:buFont typeface="Wingdings" panose="05000000000000000000" pitchFamily="2" charset="2"/>
+              <a:buChar char="§"/>
+              <a:defRPr sz="1200" kern="1200">
+                <a:solidFill>
+                  <a:schemeClr val="tx1"/>
+                </a:solidFill>
+                <a:effectLst/>
+                <a:latin typeface="+mn-lt"/>
+                <a:ea typeface="+mn-ea"/>
+                <a:cs typeface="+mn-cs"/>
+              </a:defRPr>
+            </a:lvl6pPr>
+            <a:lvl7pPr marL="2971800" indent="-228600" algn="l" defTabSz="914400" rtl="0" eaLnBrk="1" latinLnBrk="0" hangingPunct="1">
+              <a:lnSpc>
+                <a:spcPct val="120000"/>
+              </a:lnSpc>
+              <a:spcBef>
+                <a:spcPts val="500"/>
+              </a:spcBef>
+              <a:buClr>
+                <a:schemeClr val="accent1"/>
+              </a:buClr>
+              <a:buSzPct val="110000"/>
+              <a:buFont typeface="Wingdings" panose="05000000000000000000" pitchFamily="2" charset="2"/>
+              <a:buChar char="§"/>
+              <a:defRPr sz="1200" kern="1200">
+                <a:solidFill>
+                  <a:schemeClr val="tx1"/>
+                </a:solidFill>
+                <a:effectLst/>
+                <a:latin typeface="+mn-lt"/>
+                <a:ea typeface="+mn-ea"/>
+                <a:cs typeface="+mn-cs"/>
+              </a:defRPr>
+            </a:lvl7pPr>
+            <a:lvl8pPr marL="3429000" indent="-228600" algn="l" defTabSz="914400" rtl="0" eaLnBrk="1" latinLnBrk="0" hangingPunct="1">
+              <a:lnSpc>
+                <a:spcPct val="120000"/>
+              </a:lnSpc>
+              <a:spcBef>
+                <a:spcPts val="500"/>
+              </a:spcBef>
+              <a:buClr>
+                <a:schemeClr val="accent1"/>
+              </a:buClr>
+              <a:buSzPct val="110000"/>
+              <a:buFont typeface="Wingdings" panose="05000000000000000000" pitchFamily="2" charset="2"/>
+              <a:buChar char="§"/>
+              <a:defRPr sz="1200" kern="1200">
+                <a:solidFill>
+                  <a:schemeClr val="tx1"/>
+                </a:solidFill>
+                <a:effectLst/>
+                <a:latin typeface="+mn-lt"/>
+                <a:ea typeface="+mn-ea"/>
+                <a:cs typeface="+mn-cs"/>
+              </a:defRPr>
+            </a:lvl8pPr>
+            <a:lvl9pPr marL="3886200" indent="-228600" algn="l" defTabSz="914400" rtl="0" eaLnBrk="1" latinLnBrk="0" hangingPunct="1">
+              <a:lnSpc>
+                <a:spcPct val="120000"/>
+              </a:lnSpc>
+              <a:spcBef>
+                <a:spcPts val="500"/>
+              </a:spcBef>
+              <a:buClr>
+                <a:schemeClr val="accent1"/>
+              </a:buClr>
+              <a:buSzPct val="110000"/>
+              <a:buFont typeface="Wingdings" panose="05000000000000000000" pitchFamily="2" charset="2"/>
+              <a:buChar char="§"/>
+              <a:defRPr sz="1200" kern="1200">
+                <a:solidFill>
+                  <a:schemeClr val="tx1"/>
+                </a:solidFill>
+                <a:effectLst/>
+                <a:latin typeface="+mn-lt"/>
+                <a:ea typeface="+mn-ea"/>
+                <a:cs typeface="+mn-cs"/>
+              </a:defRPr>
+            </a:lvl9pPr>
+          </a:lstStyle>
+          <a:p>
+            <a:pPr marL="0" indent="0">
+              <a:buNone/>
+            </a:pPr>
+            <a:r>
+              <a:rPr lang="en-CA" b="1"/>
+              <a:t>AI Itself</a:t>
+            </a:r>
+            <a:endParaRPr lang="en-CA"/>
+          </a:p>
+          <a:p>
+            <a:r>
+              <a:rPr lang="en-CA"/>
+              <a:t>Not currently treated as a legal person.</a:t>
+            </a:r>
+          </a:p>
+          <a:p>
+            <a:pPr marL="0" indent="0">
+              <a:buNone/>
+            </a:pPr>
+            <a:endParaRPr lang="en-US"/>
+          </a:p>
+        </p:txBody>
+      </p:sp>
+      <p:sp>
+        <p:nvSpPr>
+          <p:cNvPr id="9" name="Content Placeholder 2">
+            <a:extLst>
+              <a:ext uri="{FF2B5EF4-FFF2-40B4-BE49-F238E27FC236}">
+                <a16:creationId xmlns:a16="http://schemas.microsoft.com/office/drawing/2014/main" id="{314C17A7-9CE3-298A-C407-EE9ADDFDEB5B}"/>
+              </a:ext>
+            </a:extLst>
+          </p:cNvPr>
+          <p:cNvSpPr txBox="1">
+            <a:spLocks/>
+          </p:cNvSpPr>
+          <p:nvPr/>
+        </p:nvSpPr>
+        <p:spPr>
+          <a:xfrm>
+            <a:off x="8386970" y="1603287"/>
+            <a:ext cx="2567809" cy="2382651"/>
+          </a:xfrm>
+          <a:prstGeom prst="rect">
+            <a:avLst/>
+          </a:prstGeom>
+        </p:spPr>
+        <p:txBody>
+          <a:bodyPr vert="horz" lIns="91440" tIns="45720" rIns="91440" bIns="45720" rtlCol="0">
+            <a:normAutofit/>
+          </a:bodyPr>
+          <a:lstStyle>
+            <a:lvl1pPr marL="228600" indent="-228600" algn="l" defTabSz="914400" rtl="0" eaLnBrk="1" latinLnBrk="0" hangingPunct="1">
+              <a:lnSpc>
+                <a:spcPct val="120000"/>
+              </a:lnSpc>
+              <a:spcBef>
+                <a:spcPts val="1000"/>
+              </a:spcBef>
+              <a:buClr>
+                <a:schemeClr val="accent1"/>
+              </a:buClr>
+              <a:buSzPct val="110000"/>
+              <a:buFont typeface="Wingdings" panose="05000000000000000000" pitchFamily="2" charset="2"/>
+              <a:buChar char="§"/>
+              <a:defRPr sz="1800" kern="1200">
+                <a:solidFill>
+                  <a:schemeClr val="tx1"/>
+                </a:solidFill>
+                <a:effectLst/>
+                <a:latin typeface="+mn-lt"/>
+                <a:ea typeface="+mn-ea"/>
+                <a:cs typeface="+mn-cs"/>
+              </a:defRPr>
+            </a:lvl1pPr>
+            <a:lvl2pPr marL="685800" indent="-228600" algn="l" defTabSz="914400" rtl="0" eaLnBrk="1" latinLnBrk="0" hangingPunct="1">
+              <a:lnSpc>
+                <a:spcPct val="120000"/>
+              </a:lnSpc>
+              <a:spcBef>
+                <a:spcPts val="500"/>
+              </a:spcBef>
+              <a:buClr>
+                <a:schemeClr val="accent1"/>
+              </a:buClr>
+              <a:buSzPct val="110000"/>
+              <a:buFont typeface="Wingdings" panose="05000000000000000000" pitchFamily="2" charset="2"/>
+              <a:buChar char="§"/>
+              <a:defRPr sz="1600" kern="1200">
+                <a:solidFill>
+                  <a:schemeClr val="tx1"/>
+                </a:solidFill>
+                <a:effectLst/>
+                <a:latin typeface="+mn-lt"/>
+                <a:ea typeface="+mn-ea"/>
+                <a:cs typeface="+mn-cs"/>
+              </a:defRPr>
+            </a:lvl2pPr>
+            <a:lvl3pPr marL="1143000" indent="-228600" algn="l" defTabSz="914400" rtl="0" eaLnBrk="1" latinLnBrk="0" hangingPunct="1">
+              <a:lnSpc>
+                <a:spcPct val="120000"/>
+              </a:lnSpc>
+              <a:spcBef>
+                <a:spcPts val="500"/>
+              </a:spcBef>
+              <a:buClr>
+                <a:schemeClr val="accent1"/>
+              </a:buClr>
+              <a:buSzPct val="110000"/>
+              <a:buFont typeface="Wingdings" panose="05000000000000000000" pitchFamily="2" charset="2"/>
+              <a:buChar char="§"/>
+              <a:defRPr sz="1400" kern="1200">
+                <a:solidFill>
+                  <a:schemeClr val="tx1"/>
+                </a:solidFill>
+                <a:effectLst/>
+                <a:latin typeface="+mn-lt"/>
+                <a:ea typeface="+mn-ea"/>
+                <a:cs typeface="+mn-cs"/>
+              </a:defRPr>
+            </a:lvl3pPr>
+            <a:lvl4pPr marL="1600200" indent="-228600" algn="l" defTabSz="914400" rtl="0" eaLnBrk="1" latinLnBrk="0" hangingPunct="1">
+              <a:lnSpc>
+                <a:spcPct val="120000"/>
+              </a:lnSpc>
+              <a:spcBef>
+                <a:spcPts val="500"/>
+              </a:spcBef>
+              <a:buClr>
+                <a:schemeClr val="accent1"/>
+              </a:buClr>
+              <a:buSzPct val="110000"/>
+              <a:buFont typeface="Wingdings" panose="05000000000000000000" pitchFamily="2" charset="2"/>
+              <a:buChar char="§"/>
+              <a:defRPr sz="1200" kern="1200">
+                <a:solidFill>
+                  <a:schemeClr val="tx1"/>
+                </a:solidFill>
+                <a:effectLst/>
+                <a:latin typeface="+mn-lt"/>
+                <a:ea typeface="+mn-ea"/>
+                <a:cs typeface="+mn-cs"/>
+              </a:defRPr>
+            </a:lvl4pPr>
+            <a:lvl5pPr marL="2057400" indent="-228600" algn="l" defTabSz="914400" rtl="0" eaLnBrk="1" latinLnBrk="0" hangingPunct="1">
+              <a:lnSpc>
+                <a:spcPct val="120000"/>
+              </a:lnSpc>
+              <a:spcBef>
+                <a:spcPts val="500"/>
+              </a:spcBef>
+              <a:buClr>
+                <a:schemeClr val="accent1"/>
+              </a:buClr>
+              <a:buSzPct val="110000"/>
+              <a:buFont typeface="Wingdings" panose="05000000000000000000" pitchFamily="2" charset="2"/>
+              <a:buChar char="§"/>
+              <a:defRPr sz="1200" kern="1200">
+                <a:solidFill>
+                  <a:schemeClr val="tx1"/>
+                </a:solidFill>
+                <a:effectLst/>
+                <a:latin typeface="+mn-lt"/>
+                <a:ea typeface="+mn-ea"/>
+                <a:cs typeface="+mn-cs"/>
+              </a:defRPr>
+            </a:lvl5pPr>
+            <a:lvl6pPr marL="2514600" indent="-228600" algn="l" defTabSz="914400" rtl="0" eaLnBrk="1" latinLnBrk="0" hangingPunct="1">
+              <a:lnSpc>
+                <a:spcPct val="120000"/>
+              </a:lnSpc>
+              <a:spcBef>
+                <a:spcPts val="500"/>
+              </a:spcBef>
+              <a:buClr>
+                <a:schemeClr val="accent1"/>
+              </a:buClr>
+              <a:buSzPct val="110000"/>
+              <a:buFont typeface="Wingdings" panose="05000000000000000000" pitchFamily="2" charset="2"/>
+              <a:buChar char="§"/>
+              <a:defRPr sz="1200" kern="1200">
+                <a:solidFill>
+                  <a:schemeClr val="tx1"/>
+                </a:solidFill>
+                <a:effectLst/>
+                <a:latin typeface="+mn-lt"/>
+                <a:ea typeface="+mn-ea"/>
+                <a:cs typeface="+mn-cs"/>
+              </a:defRPr>
+            </a:lvl6pPr>
+            <a:lvl7pPr marL="2971800" indent="-228600" algn="l" defTabSz="914400" rtl="0" eaLnBrk="1" latinLnBrk="0" hangingPunct="1">
+              <a:lnSpc>
+                <a:spcPct val="120000"/>
+              </a:lnSpc>
+              <a:spcBef>
+                <a:spcPts val="500"/>
+              </a:spcBef>
+              <a:buClr>
+                <a:schemeClr val="accent1"/>
+              </a:buClr>
+              <a:buSzPct val="110000"/>
+              <a:buFont typeface="Wingdings" panose="05000000000000000000" pitchFamily="2" charset="2"/>
+              <a:buChar char="§"/>
+              <a:defRPr sz="1200" kern="1200">
+                <a:solidFill>
+                  <a:schemeClr val="tx1"/>
+                </a:solidFill>
+                <a:effectLst/>
+                <a:latin typeface="+mn-lt"/>
+                <a:ea typeface="+mn-ea"/>
+                <a:cs typeface="+mn-cs"/>
+              </a:defRPr>
+            </a:lvl7pPr>
+            <a:lvl8pPr marL="3429000" indent="-228600" algn="l" defTabSz="914400" rtl="0" eaLnBrk="1" latinLnBrk="0" hangingPunct="1">
+              <a:lnSpc>
+                <a:spcPct val="120000"/>
+              </a:lnSpc>
+              <a:spcBef>
+                <a:spcPts val="500"/>
+              </a:spcBef>
+              <a:buClr>
+                <a:schemeClr val="accent1"/>
+              </a:buClr>
+              <a:buSzPct val="110000"/>
+              <a:buFont typeface="Wingdings" panose="05000000000000000000" pitchFamily="2" charset="2"/>
+              <a:buChar char="§"/>
+              <a:defRPr sz="1200" kern="1200">
+                <a:solidFill>
+                  <a:schemeClr val="tx1"/>
+                </a:solidFill>
+                <a:effectLst/>
+                <a:latin typeface="+mn-lt"/>
+                <a:ea typeface="+mn-ea"/>
+                <a:cs typeface="+mn-cs"/>
+              </a:defRPr>
+            </a:lvl8pPr>
+            <a:lvl9pPr marL="3886200" indent="-228600" algn="l" defTabSz="914400" rtl="0" eaLnBrk="1" latinLnBrk="0" hangingPunct="1">
+              <a:lnSpc>
+                <a:spcPct val="120000"/>
+              </a:lnSpc>
+              <a:spcBef>
+                <a:spcPts val="500"/>
+              </a:spcBef>
+              <a:buClr>
+                <a:schemeClr val="accent1"/>
+              </a:buClr>
+              <a:buSzPct val="110000"/>
+              <a:buFont typeface="Wingdings" panose="05000000000000000000" pitchFamily="2" charset="2"/>
+              <a:buChar char="§"/>
+              <a:defRPr sz="1200" kern="1200">
+                <a:solidFill>
+                  <a:schemeClr val="tx1"/>
+                </a:solidFill>
+                <a:effectLst/>
+                <a:latin typeface="+mn-lt"/>
+                <a:ea typeface="+mn-ea"/>
+                <a:cs typeface="+mn-cs"/>
+              </a:defRPr>
+            </a:lvl9pPr>
+          </a:lstStyle>
+          <a:p>
+            <a:pPr marL="0" indent="0">
+              <a:buNone/>
+            </a:pPr>
+            <a:r>
+              <a:rPr lang="en-CA" b="1"/>
+              <a:t>Developers</a:t>
+            </a:r>
+            <a:endParaRPr lang="en-CA"/>
+          </a:p>
+          <a:p>
+            <a:r>
+              <a:rPr lang="en-CA"/>
+              <a:t>May be liable for defective AI systems.</a:t>
+            </a:r>
+          </a:p>
+        </p:txBody>
+      </p:sp>
+    </p:spTree>
+    <p:extLst>
+      <p:ext uri="{BB962C8B-B14F-4D97-AF65-F5344CB8AC3E}">
+        <p14:creationId xmlns:p14="http://schemas.microsoft.com/office/powerpoint/2010/main" val="39423591"/>
+      </p:ext>
+    </p:extLst>
+  </p:cSld>
+  <p:clrMapOvr>
+    <a:masterClrMapping/>
+  </p:clrMapOvr>
+</p:sld>
+</file>
+
+<file path=ppt/slides/slide8.xml><?xml version="1.0" encoding="utf-8"?>
+<p:sld xmlns:a="http://schemas.openxmlformats.org/drawingml/2006/main" xmlns:r="http://schemas.openxmlformats.org/officeDocument/2006/relationships" xmlns:p="http://schemas.openxmlformats.org/presentationml/2006/main">
+  <p:cSld>
+    <p:spTree>
+      <p:nvGrpSpPr>
+        <p:cNvPr id="1" name="">
+          <a:extLst>
+            <a:ext uri="{FF2B5EF4-FFF2-40B4-BE49-F238E27FC236}">
+              <a16:creationId xmlns:a16="http://schemas.microsoft.com/office/drawing/2014/main" id="{65B829AF-12B5-641F-3236-861F1CAB7FF2}"/>
+            </a:ext>
+          </a:extLst>
+        </p:cNvPr>
+        <p:cNvGrpSpPr/>
+        <p:nvPr/>
+      </p:nvGrpSpPr>
+      <p:grpSpPr>
+        <a:xfrm>
+          <a:off x="0" y="0"/>
+          <a:ext cx="0" cy="0"/>
+          <a:chOff x="0" y="0"/>
+          <a:chExt cx="0" cy="0"/>
+        </a:xfrm>
+      </p:grpSpPr>
+      <p:sp>
+        <p:nvSpPr>
+          <p:cNvPr id="2" name="Title 1">
+            <a:extLst>
+              <a:ext uri="{FF2B5EF4-FFF2-40B4-BE49-F238E27FC236}">
+                <a16:creationId xmlns:a16="http://schemas.microsoft.com/office/drawing/2014/main" id="{4152A814-FCDC-FD9A-B269-0BA6E4D163D1}"/>
+              </a:ext>
+            </a:extLst>
+          </p:cNvPr>
+          <p:cNvSpPr>
+            <a:spLocks noGrp="1"/>
+          </p:cNvSpPr>
+          <p:nvPr>
+            <p:ph type="title"/>
+          </p:nvPr>
+        </p:nvSpPr>
+        <p:spPr>
+          <a:xfrm>
+            <a:off x="3350888" y="2409581"/>
+            <a:ext cx="5490224" cy="1689390"/>
+          </a:xfrm>
+        </p:spPr>
+        <p:txBody>
+          <a:bodyPr>
+            <a:normAutofit/>
+          </a:bodyPr>
+          <a:lstStyle/>
+          <a:p>
+            <a:r>
+              <a:rPr lang="en-CA" b="1"/>
+              <a:t>Legal Responsibility and Accountability</a:t>
+            </a:r>
+            <a:endParaRPr lang="en-CA"/>
+          </a:p>
+        </p:txBody>
+      </p:sp>
+    </p:spTree>
+    <p:extLst>
+      <p:ext uri="{BB962C8B-B14F-4D97-AF65-F5344CB8AC3E}">
+        <p14:creationId xmlns:p14="http://schemas.microsoft.com/office/powerpoint/2010/main" val="1476873126"/>
+      </p:ext>
+    </p:extLst>
+  </p:cSld>
+  <p:clrMapOvr>
+    <a:masterClrMapping/>
+  </p:clrMapOvr>
+</p:sld>
+</file>
+
+<file path=ppt/slides/slide9.xml><?xml version="1.0" encoding="utf-8"?>
+<p:sld xmlns:a="http://schemas.openxmlformats.org/drawingml/2006/main" xmlns:r="http://schemas.openxmlformats.org/officeDocument/2006/relationships" xmlns:p="http://schemas.openxmlformats.org/presentationml/2006/main">
+  <p:cSld>
+    <p:spTree>
+      <p:nvGrpSpPr>
+        <p:cNvPr id="1" name="">
+          <a:extLst>
+            <a:ext uri="{FF2B5EF4-FFF2-40B4-BE49-F238E27FC236}">
+              <a16:creationId xmlns:a16="http://schemas.microsoft.com/office/drawing/2014/main" id="{E5A1B0EB-3521-133E-61D9-D65EF54BE254}"/>
+            </a:ext>
+          </a:extLst>
+        </p:cNvPr>
+        <p:cNvGrpSpPr/>
+        <p:nvPr/>
+      </p:nvGrpSpPr>
+      <p:grpSpPr>
+        <a:xfrm>
+          <a:off x="0" y="0"/>
+          <a:ext cx="0" cy="0"/>
+          <a:chOff x="0" y="0"/>
+          <a:chExt cx="0" cy="0"/>
+        </a:xfrm>
+      </p:grpSpPr>
+      <p:sp>
+        <p:nvSpPr>
+          <p:cNvPr id="2" name="Title 1">
+            <a:extLst>
+              <a:ext uri="{FF2B5EF4-FFF2-40B4-BE49-F238E27FC236}">
+                <a16:creationId xmlns:a16="http://schemas.microsoft.com/office/drawing/2014/main" id="{79D70F9E-57C1-9A19-D648-7E2E5F072D78}"/>
+              </a:ext>
+            </a:extLst>
+          </p:cNvPr>
+          <p:cNvSpPr>
+            <a:spLocks noGrp="1"/>
+          </p:cNvSpPr>
+          <p:nvPr>
+            <p:ph type="title"/>
+          </p:nvPr>
+        </p:nvSpPr>
+        <p:spPr/>
+        <p:txBody>
+          <a:bodyPr/>
+          <a:lstStyle/>
+          <a:p>
+            <a:r>
+              <a:rPr lang="en-CA" b="1"/>
+              <a:t>Real Word Cases</a:t>
+            </a:r>
+            <a:endParaRPr lang="en-US"/>
+          </a:p>
+        </p:txBody>
+      </p:sp>
+      <p:pic>
+        <p:nvPicPr>
+          <p:cNvPr id="3" name="Picture 2">
+            <a:extLst>
+              <a:ext uri="{FF2B5EF4-FFF2-40B4-BE49-F238E27FC236}">
+                <a16:creationId xmlns:a16="http://schemas.microsoft.com/office/drawing/2014/main" id="{AD168035-E976-C8BC-D309-E832DED8470B}"/>
+              </a:ext>
+            </a:extLst>
+          </p:cNvPr>
+          <p:cNvPicPr>
+            <a:picLocks noChangeAspect="1"/>
+          </p:cNvPicPr>
+          <p:nvPr/>
+        </p:nvPicPr>
+        <p:blipFill>
+          <a:blip r:embed="rId2"/>
+          <a:stretch>
+            <a:fillRect/>
+          </a:stretch>
+        </p:blipFill>
+        <p:spPr>
+          <a:xfrm>
+            <a:off x="4919804" y="1334965"/>
+            <a:ext cx="6383195" cy="4188069"/>
+          </a:xfrm>
+          <a:prstGeom prst="rect">
+            <a:avLst/>
+          </a:prstGeom>
+        </p:spPr>
+      </p:pic>
+    </p:spTree>
+    <p:extLst>
+      <p:ext uri="{BB962C8B-B14F-4D97-AF65-F5344CB8AC3E}">
+        <p14:creationId xmlns:p14="http://schemas.microsoft.com/office/powerpoint/2010/main" val="3030522767"/>
+      </p:ext>
+    </p:extLst>
+  </p:cSld>
+  <p:clrMapOvr>
+    <a:masterClrMapping/>
+  </p:clrMapOvr>
+</p:sld>
+</file>
+
 <file path=ppt/theme/theme1.xml><?xml version="1.0" encoding="utf-8"?>
 <a:theme xmlns:a="http://schemas.openxmlformats.org/drawingml/2006/main" name="Atlas">
   <a:themeElements>
